--- a/docs/pptx/entire/ritu-entire-linsubhr-ratio-akikdigo.pptx
+++ b/docs/pptx/entire/ritu-entire-linsubhr-ratio-akikdigo.pptx
@@ -2960,587 +2960,584 @@
           <p:spPr>
             <a:xfrm>
               <a:off x="1172049" y="2073503"/>
-              <a:ext cx="7090630" cy="3359691"/>
+              <a:ext cx="7090630" cy="3360435"/>
             </a:xfrm>
             <a:custGeom>
               <a:avLst/>
               <a:pathLst>
-                <a:path w="7090630" h="3359691">
+                <a:path w="7090630" h="3360435">
                   <a:moveTo>
-                    <a:pt x="640840" y="0"/>
+                    <a:pt x="649619" y="0"/>
                   </a:moveTo>
                   <a:lnTo>
-                    <a:pt x="644602" y="6891"/>
-                  </a:lnTo>
-                  <a:lnTo>
-                    <a:pt x="716225" y="133301"/>
-                  </a:lnTo>
-                  <a:lnTo>
-                    <a:pt x="787847" y="255115"/>
-                  </a:lnTo>
-                  <a:lnTo>
-                    <a:pt x="859470" y="372500"/>
-                  </a:lnTo>
-                  <a:lnTo>
-                    <a:pt x="931092" y="485618"/>
-                  </a:lnTo>
-                  <a:lnTo>
-                    <a:pt x="1002715" y="594623"/>
-                  </a:lnTo>
-                  <a:lnTo>
-                    <a:pt x="1074337" y="699664"/>
-                  </a:lnTo>
-                  <a:lnTo>
-                    <a:pt x="1145960" y="800887"/>
-                  </a:lnTo>
-                  <a:lnTo>
-                    <a:pt x="1217582" y="898429"/>
-                  </a:lnTo>
-                  <a:lnTo>
-                    <a:pt x="1289205" y="992425"/>
-                  </a:lnTo>
-                  <a:lnTo>
-                    <a:pt x="1360827" y="1083004"/>
-                  </a:lnTo>
-                  <a:lnTo>
-                    <a:pt x="1432450" y="1170289"/>
-                  </a:lnTo>
-                  <a:lnTo>
-                    <a:pt x="1504073" y="1254401"/>
-                  </a:lnTo>
-                  <a:lnTo>
-                    <a:pt x="1575695" y="1335455"/>
-                  </a:lnTo>
-                  <a:lnTo>
-                    <a:pt x="1647318" y="1413561"/>
-                  </a:lnTo>
-                  <a:lnTo>
-                    <a:pt x="1718940" y="1488828"/>
-                  </a:lnTo>
-                  <a:lnTo>
-                    <a:pt x="1790563" y="1561359"/>
-                  </a:lnTo>
-                  <a:lnTo>
-                    <a:pt x="1862185" y="1631252"/>
-                  </a:lnTo>
-                  <a:lnTo>
-                    <a:pt x="1933808" y="1698605"/>
-                  </a:lnTo>
-                  <a:lnTo>
-                    <a:pt x="2005430" y="1763508"/>
-                  </a:lnTo>
-                  <a:lnTo>
-                    <a:pt x="2077053" y="1826052"/>
-                  </a:lnTo>
-                  <a:lnTo>
-                    <a:pt x="2148675" y="1886322"/>
-                  </a:lnTo>
-                  <a:lnTo>
-                    <a:pt x="2220298" y="1944400"/>
-                  </a:lnTo>
-                  <a:lnTo>
-                    <a:pt x="2291920" y="2000367"/>
-                  </a:lnTo>
-                  <a:lnTo>
-                    <a:pt x="2363543" y="2054299"/>
-                  </a:lnTo>
-                  <a:lnTo>
-                    <a:pt x="2435165" y="2106271"/>
-                  </a:lnTo>
-                  <a:lnTo>
-                    <a:pt x="2506788" y="2156352"/>
-                  </a:lnTo>
-                  <a:lnTo>
-                    <a:pt x="2578410" y="2204613"/>
-                  </a:lnTo>
-                  <a:lnTo>
-                    <a:pt x="2650033" y="2251120"/>
-                  </a:lnTo>
-                  <a:lnTo>
-                    <a:pt x="2721655" y="2295935"/>
-                  </a:lnTo>
-                  <a:lnTo>
-                    <a:pt x="2793278" y="2339121"/>
-                  </a:lnTo>
-                  <a:lnTo>
-                    <a:pt x="2864901" y="2380737"/>
-                  </a:lnTo>
-                  <a:lnTo>
-                    <a:pt x="2936523" y="2420840"/>
-                  </a:lnTo>
-                  <a:lnTo>
-                    <a:pt x="3008146" y="2459484"/>
-                  </a:lnTo>
-                  <a:lnTo>
-                    <a:pt x="3079768" y="2496724"/>
-                  </a:lnTo>
-                  <a:lnTo>
-                    <a:pt x="3151391" y="2532610"/>
-                  </a:lnTo>
-                  <a:lnTo>
-                    <a:pt x="3223013" y="2567191"/>
-                  </a:lnTo>
-                  <a:lnTo>
-                    <a:pt x="3294636" y="2600515"/>
-                  </a:lnTo>
-                  <a:lnTo>
-                    <a:pt x="3366258" y="2632627"/>
-                  </a:lnTo>
-                  <a:lnTo>
-                    <a:pt x="3437881" y="2657590"/>
-                  </a:lnTo>
-                  <a:lnTo>
-                    <a:pt x="3509503" y="2668372"/>
-                  </a:lnTo>
-                  <a:lnTo>
-                    <a:pt x="3581126" y="2679013"/>
-                  </a:lnTo>
-                  <a:lnTo>
-                    <a:pt x="3652748" y="2689516"/>
-                  </a:lnTo>
-                  <a:lnTo>
-                    <a:pt x="3724371" y="2699881"/>
-                  </a:lnTo>
-                  <a:lnTo>
-                    <a:pt x="3795993" y="2710111"/>
-                  </a:lnTo>
-                  <a:lnTo>
-                    <a:pt x="3867616" y="2720208"/>
-                  </a:lnTo>
-                  <a:lnTo>
-                    <a:pt x="3939238" y="2730173"/>
-                  </a:lnTo>
-                  <a:lnTo>
-                    <a:pt x="4010861" y="2740008"/>
-                  </a:lnTo>
-                  <a:lnTo>
-                    <a:pt x="4082483" y="2749714"/>
-                  </a:lnTo>
-                  <a:lnTo>
-                    <a:pt x="4154106" y="2759294"/>
-                  </a:lnTo>
-                  <a:lnTo>
-                    <a:pt x="4225729" y="2768749"/>
-                  </a:lnTo>
-                  <a:lnTo>
-                    <a:pt x="4297351" y="2778080"/>
-                  </a:lnTo>
-                  <a:lnTo>
-                    <a:pt x="4368974" y="2787290"/>
-                  </a:lnTo>
-                  <a:lnTo>
-                    <a:pt x="4440596" y="2796379"/>
-                  </a:lnTo>
-                  <a:lnTo>
-                    <a:pt x="4512219" y="2805350"/>
-                  </a:lnTo>
-                  <a:lnTo>
-                    <a:pt x="4583841" y="2814204"/>
-                  </a:lnTo>
-                  <a:lnTo>
-                    <a:pt x="4655464" y="2822942"/>
-                  </a:lnTo>
-                  <a:lnTo>
-                    <a:pt x="4727086" y="2831566"/>
-                  </a:lnTo>
-                  <a:lnTo>
-                    <a:pt x="4798709" y="2840078"/>
-                  </a:lnTo>
-                  <a:lnTo>
-                    <a:pt x="4870331" y="2848478"/>
-                  </a:lnTo>
-                  <a:lnTo>
-                    <a:pt x="4941954" y="2856769"/>
-                  </a:lnTo>
-                  <a:lnTo>
-                    <a:pt x="5013576" y="2864952"/>
-                  </a:lnTo>
-                  <a:lnTo>
-                    <a:pt x="5085199" y="2873028"/>
-                  </a:lnTo>
-                  <a:lnTo>
-                    <a:pt x="5156821" y="2880998"/>
-                  </a:lnTo>
-                  <a:lnTo>
-                    <a:pt x="5228444" y="2888865"/>
-                  </a:lnTo>
-                  <a:lnTo>
-                    <a:pt x="5300066" y="2896628"/>
-                  </a:lnTo>
-                  <a:lnTo>
-                    <a:pt x="5371689" y="2904291"/>
-                  </a:lnTo>
-                  <a:lnTo>
-                    <a:pt x="5443311" y="2911853"/>
-                  </a:lnTo>
-                  <a:lnTo>
-                    <a:pt x="5514934" y="2919317"/>
-                  </a:lnTo>
-                  <a:lnTo>
-                    <a:pt x="5586557" y="2926683"/>
-                  </a:lnTo>
-                  <a:lnTo>
-                    <a:pt x="5658179" y="2933954"/>
-                  </a:lnTo>
-                  <a:lnTo>
-                    <a:pt x="5729802" y="2941129"/>
-                  </a:lnTo>
-                  <a:lnTo>
-                    <a:pt x="5801424" y="2948211"/>
-                  </a:lnTo>
-                  <a:lnTo>
-                    <a:pt x="5873047" y="2955200"/>
-                  </a:lnTo>
-                  <a:lnTo>
-                    <a:pt x="5944669" y="2962098"/>
-                  </a:lnTo>
-                  <a:lnTo>
-                    <a:pt x="6016292" y="2968906"/>
-                  </a:lnTo>
-                  <a:lnTo>
-                    <a:pt x="6087914" y="2975625"/>
-                  </a:lnTo>
-                  <a:lnTo>
-                    <a:pt x="6159537" y="2982257"/>
-                  </a:lnTo>
-                  <a:lnTo>
-                    <a:pt x="6231159" y="2988802"/>
-                  </a:lnTo>
-                  <a:lnTo>
-                    <a:pt x="6302782" y="2995261"/>
-                  </a:lnTo>
-                  <a:lnTo>
-                    <a:pt x="6374404" y="3001636"/>
-                  </a:lnTo>
-                  <a:lnTo>
-                    <a:pt x="6446027" y="3007928"/>
-                  </a:lnTo>
-                  <a:lnTo>
-                    <a:pt x="6517649" y="3014138"/>
-                  </a:lnTo>
-                  <a:lnTo>
-                    <a:pt x="6589272" y="3020267"/>
-                  </a:lnTo>
-                  <a:lnTo>
-                    <a:pt x="6660894" y="3026316"/>
-                  </a:lnTo>
-                  <a:lnTo>
-                    <a:pt x="6732517" y="3032286"/>
-                  </a:lnTo>
-                  <a:lnTo>
-                    <a:pt x="6804139" y="3038178"/>
-                  </a:lnTo>
-                  <a:lnTo>
-                    <a:pt x="6875762" y="3043993"/>
-                  </a:lnTo>
-                  <a:lnTo>
-                    <a:pt x="6947385" y="3049732"/>
-                  </a:lnTo>
-                  <a:lnTo>
-                    <a:pt x="7019007" y="3055396"/>
-                  </a:lnTo>
-                  <a:lnTo>
-                    <a:pt x="7090630" y="3060987"/>
-                  </a:lnTo>
-                  <a:lnTo>
-                    <a:pt x="7090630" y="3359691"/>
-                  </a:lnTo>
-                  <a:lnTo>
-                    <a:pt x="7019007" y="3355010"/>
-                  </a:lnTo>
-                  <a:lnTo>
-                    <a:pt x="6947385" y="3350153"/>
-                  </a:lnTo>
-                  <a:lnTo>
-                    <a:pt x="6875762" y="3345113"/>
-                  </a:lnTo>
-                  <a:lnTo>
-                    <a:pt x="6804139" y="3339882"/>
-                  </a:lnTo>
-                  <a:lnTo>
-                    <a:pt x="6732517" y="3334454"/>
-                  </a:lnTo>
-                  <a:lnTo>
-                    <a:pt x="6660894" y="3328821"/>
-                  </a:lnTo>
-                  <a:lnTo>
-                    <a:pt x="6589272" y="3322976"/>
-                  </a:lnTo>
-                  <a:lnTo>
-                    <a:pt x="6517649" y="3316910"/>
-                  </a:lnTo>
-                  <a:lnTo>
-                    <a:pt x="6446027" y="3310616"/>
-                  </a:lnTo>
-                  <a:lnTo>
-                    <a:pt x="6374404" y="3304084"/>
-                  </a:lnTo>
-                  <a:lnTo>
-                    <a:pt x="6302782" y="3297305"/>
-                  </a:lnTo>
-                  <a:lnTo>
-                    <a:pt x="6231159" y="3290271"/>
-                  </a:lnTo>
-                  <a:lnTo>
-                    <a:pt x="6159537" y="3282971"/>
-                  </a:lnTo>
-                  <a:lnTo>
-                    <a:pt x="6087914" y="3275396"/>
-                  </a:lnTo>
-                  <a:lnTo>
-                    <a:pt x="6016292" y="3267535"/>
-                  </a:lnTo>
-                  <a:lnTo>
-                    <a:pt x="5944669" y="3259378"/>
-                  </a:lnTo>
-                  <a:lnTo>
-                    <a:pt x="5873047" y="3250912"/>
-                  </a:lnTo>
-                  <a:lnTo>
-                    <a:pt x="5801424" y="3242128"/>
-                  </a:lnTo>
-                  <a:lnTo>
-                    <a:pt x="5729802" y="3233011"/>
-                  </a:lnTo>
-                  <a:lnTo>
-                    <a:pt x="5658179" y="3223551"/>
-                  </a:lnTo>
-                  <a:lnTo>
-                    <a:pt x="5586557" y="3213734"/>
-                  </a:lnTo>
-                  <a:lnTo>
-                    <a:pt x="5514934" y="3203547"/>
-                  </a:lnTo>
-                  <a:lnTo>
-                    <a:pt x="5443311" y="3192975"/>
-                  </a:lnTo>
-                  <a:lnTo>
-                    <a:pt x="5371689" y="3182005"/>
-                  </a:lnTo>
-                  <a:lnTo>
-                    <a:pt x="5300066" y="3170620"/>
-                  </a:lnTo>
-                  <a:lnTo>
-                    <a:pt x="5228444" y="3158806"/>
-                  </a:lnTo>
-                  <a:lnTo>
-                    <a:pt x="5156821" y="3146546"/>
-                  </a:lnTo>
-                  <a:lnTo>
-                    <a:pt x="5085199" y="3133824"/>
-                  </a:lnTo>
-                  <a:lnTo>
-                    <a:pt x="5013576" y="3120621"/>
-                  </a:lnTo>
-                  <a:lnTo>
-                    <a:pt x="4941954" y="3106921"/>
-                  </a:lnTo>
-                  <a:lnTo>
-                    <a:pt x="4870331" y="3092704"/>
-                  </a:lnTo>
-                  <a:lnTo>
-                    <a:pt x="4798709" y="3077950"/>
-                  </a:lnTo>
-                  <a:lnTo>
-                    <a:pt x="4727086" y="3062639"/>
-                  </a:lnTo>
-                  <a:lnTo>
-                    <a:pt x="4655464" y="3046751"/>
-                  </a:lnTo>
-                  <a:lnTo>
-                    <a:pt x="4583841" y="3030264"/>
-                  </a:lnTo>
-                  <a:lnTo>
-                    <a:pt x="4512219" y="3013154"/>
-                  </a:lnTo>
-                  <a:lnTo>
-                    <a:pt x="4440596" y="2995399"/>
-                  </a:lnTo>
-                  <a:lnTo>
-                    <a:pt x="4368974" y="2976974"/>
-                  </a:lnTo>
-                  <a:lnTo>
-                    <a:pt x="4297351" y="2957854"/>
-                  </a:lnTo>
-                  <a:lnTo>
-                    <a:pt x="4225729" y="2938012"/>
-                  </a:lnTo>
-                  <a:lnTo>
-                    <a:pt x="4154106" y="2917422"/>
-                  </a:lnTo>
-                  <a:lnTo>
-                    <a:pt x="4082483" y="2896055"/>
-                  </a:lnTo>
-                  <a:lnTo>
-                    <a:pt x="4010861" y="2873882"/>
-                  </a:lnTo>
-                  <a:lnTo>
-                    <a:pt x="3939238" y="2850872"/>
-                  </a:lnTo>
-                  <a:lnTo>
-                    <a:pt x="3867616" y="2826994"/>
-                  </a:lnTo>
-                  <a:lnTo>
-                    <a:pt x="3795993" y="2802215"/>
-                  </a:lnTo>
-                  <a:lnTo>
-                    <a:pt x="3724371" y="2776501"/>
-                  </a:lnTo>
-                  <a:lnTo>
-                    <a:pt x="3652748" y="2749817"/>
-                  </a:lnTo>
-                  <a:lnTo>
-                    <a:pt x="3581126" y="2722127"/>
-                  </a:lnTo>
-                  <a:lnTo>
-                    <a:pt x="3509503" y="2693391"/>
-                  </a:lnTo>
-                  <a:lnTo>
-                    <a:pt x="3437881" y="2663572"/>
-                  </a:lnTo>
-                  <a:lnTo>
-                    <a:pt x="3366258" y="2646665"/>
-                  </a:lnTo>
-                  <a:lnTo>
-                    <a:pt x="3294636" y="2635596"/>
-                  </a:lnTo>
-                  <a:lnTo>
-                    <a:pt x="3223013" y="2624380"/>
-                  </a:lnTo>
-                  <a:lnTo>
-                    <a:pt x="3151391" y="2613016"/>
-                  </a:lnTo>
-                  <a:lnTo>
-                    <a:pt x="3079768" y="2601502"/>
-                  </a:lnTo>
-                  <a:lnTo>
-                    <a:pt x="3008146" y="2589836"/>
-                  </a:lnTo>
-                  <a:lnTo>
-                    <a:pt x="2936523" y="2578015"/>
-                  </a:lnTo>
-                  <a:lnTo>
-                    <a:pt x="2864901" y="2566038"/>
-                  </a:lnTo>
-                  <a:lnTo>
-                    <a:pt x="2793278" y="2553903"/>
-                  </a:lnTo>
-                  <a:lnTo>
-                    <a:pt x="2721655" y="2541607"/>
-                  </a:lnTo>
-                  <a:lnTo>
-                    <a:pt x="2650033" y="2529149"/>
-                  </a:lnTo>
-                  <a:lnTo>
-                    <a:pt x="2578410" y="2516525"/>
-                  </a:lnTo>
-                  <a:lnTo>
-                    <a:pt x="2506788" y="2503735"/>
-                  </a:lnTo>
-                  <a:lnTo>
-                    <a:pt x="2435165" y="2490776"/>
-                  </a:lnTo>
-                  <a:lnTo>
-                    <a:pt x="2363543" y="2477645"/>
-                  </a:lnTo>
-                  <a:lnTo>
-                    <a:pt x="2291920" y="2464341"/>
-                  </a:lnTo>
-                  <a:lnTo>
-                    <a:pt x="2220298" y="2450861"/>
-                  </a:lnTo>
-                  <a:lnTo>
-                    <a:pt x="2148675" y="2437203"/>
-                  </a:lnTo>
-                  <a:lnTo>
-                    <a:pt x="2077053" y="2423364"/>
-                  </a:lnTo>
-                  <a:lnTo>
-                    <a:pt x="2005430" y="2409342"/>
-                  </a:lnTo>
-                  <a:lnTo>
-                    <a:pt x="1933808" y="2395134"/>
-                  </a:lnTo>
-                  <a:lnTo>
-                    <a:pt x="1862185" y="2380739"/>
-                  </a:lnTo>
-                  <a:lnTo>
-                    <a:pt x="1790563" y="2366153"/>
-                  </a:lnTo>
-                  <a:lnTo>
-                    <a:pt x="1718940" y="2351375"/>
-                  </a:lnTo>
-                  <a:lnTo>
-                    <a:pt x="1647318" y="2336401"/>
-                  </a:lnTo>
-                  <a:lnTo>
-                    <a:pt x="1575695" y="2321229"/>
-                  </a:lnTo>
-                  <a:lnTo>
-                    <a:pt x="1504073" y="2305856"/>
-                  </a:lnTo>
-                  <a:lnTo>
-                    <a:pt x="1432450" y="2290280"/>
-                  </a:lnTo>
-                  <a:lnTo>
-                    <a:pt x="1360827" y="2274498"/>
-                  </a:lnTo>
-                  <a:lnTo>
-                    <a:pt x="1289205" y="2258508"/>
-                  </a:lnTo>
-                  <a:lnTo>
-                    <a:pt x="1217582" y="2242306"/>
-                  </a:lnTo>
-                  <a:lnTo>
-                    <a:pt x="1145960" y="2225890"/>
-                  </a:lnTo>
-                  <a:lnTo>
-                    <a:pt x="1074337" y="2209256"/>
-                  </a:lnTo>
-                  <a:lnTo>
-                    <a:pt x="1002715" y="2192403"/>
-                  </a:lnTo>
-                  <a:lnTo>
-                    <a:pt x="931092" y="2175327"/>
-                  </a:lnTo>
-                  <a:lnTo>
-                    <a:pt x="859470" y="2158025"/>
-                  </a:lnTo>
-                  <a:lnTo>
-                    <a:pt x="787847" y="2140494"/>
-                  </a:lnTo>
-                  <a:lnTo>
-                    <a:pt x="716225" y="2122732"/>
-                  </a:lnTo>
-                  <a:lnTo>
-                    <a:pt x="644602" y="2104734"/>
-                  </a:lnTo>
-                  <a:lnTo>
-                    <a:pt x="572980" y="2086499"/>
-                  </a:lnTo>
-                  <a:lnTo>
-                    <a:pt x="501357" y="2068022"/>
-                  </a:lnTo>
-                  <a:lnTo>
-                    <a:pt x="429735" y="2049301"/>
-                  </a:lnTo>
-                  <a:lnTo>
-                    <a:pt x="358112" y="2030333"/>
-                  </a:lnTo>
-                  <a:lnTo>
-                    <a:pt x="286490" y="2011114"/>
-                  </a:lnTo>
-                  <a:lnTo>
-                    <a:pt x="214867" y="1991640"/>
-                  </a:lnTo>
-                  <a:lnTo>
-                    <a:pt x="143245" y="1971909"/>
-                  </a:lnTo>
-                  <a:lnTo>
-                    <a:pt x="71622" y="1951917"/>
-                  </a:lnTo>
-                  <a:lnTo>
-                    <a:pt x="0" y="1931661"/>
+                    <a:pt x="716225" y="118457"/>
+                  </a:lnTo>
+                  <a:lnTo>
+                    <a:pt x="787847" y="241191"/>
+                  </a:lnTo>
+                  <a:lnTo>
+                    <a:pt x="859470" y="359449"/>
+                  </a:lnTo>
+                  <a:lnTo>
+                    <a:pt x="931092" y="473394"/>
+                  </a:lnTo>
+                  <a:lnTo>
+                    <a:pt x="1002715" y="583184"/>
+                  </a:lnTo>
+                  <a:lnTo>
+                    <a:pt x="1074337" y="688969"/>
+                  </a:lnTo>
+                  <a:lnTo>
+                    <a:pt x="1145960" y="790896"/>
+                  </a:lnTo>
+                  <a:lnTo>
+                    <a:pt x="1217582" y="889106"/>
+                  </a:lnTo>
+                  <a:lnTo>
+                    <a:pt x="1289205" y="983734"/>
+                  </a:lnTo>
+                  <a:lnTo>
+                    <a:pt x="1360827" y="1074911"/>
+                  </a:lnTo>
+                  <a:lnTo>
+                    <a:pt x="1432450" y="1162763"/>
+                  </a:lnTo>
+                  <a:lnTo>
+                    <a:pt x="1504073" y="1247411"/>
+                  </a:lnTo>
+                  <a:lnTo>
+                    <a:pt x="1575695" y="1328971"/>
+                  </a:lnTo>
+                  <a:lnTo>
+                    <a:pt x="1647318" y="1407557"/>
+                  </a:lnTo>
+                  <a:lnTo>
+                    <a:pt x="1718940" y="1483277"/>
+                  </a:lnTo>
+                  <a:lnTo>
+                    <a:pt x="1790563" y="1556236"/>
+                  </a:lnTo>
+                  <a:lnTo>
+                    <a:pt x="1862185" y="1626533"/>
+                  </a:lnTo>
+                  <a:lnTo>
+                    <a:pt x="1933808" y="1694267"/>
+                  </a:lnTo>
+                  <a:lnTo>
+                    <a:pt x="2005430" y="1759530"/>
+                  </a:lnTo>
+                  <a:lnTo>
+                    <a:pt x="2077053" y="1822413"/>
+                  </a:lnTo>
+                  <a:lnTo>
+                    <a:pt x="2148675" y="1883003"/>
+                  </a:lnTo>
+                  <a:lnTo>
+                    <a:pt x="2220298" y="1941383"/>
+                  </a:lnTo>
+                  <a:lnTo>
+                    <a:pt x="2291920" y="1997634"/>
+                  </a:lnTo>
+                  <a:lnTo>
+                    <a:pt x="2363543" y="2051834"/>
+                  </a:lnTo>
+                  <a:lnTo>
+                    <a:pt x="2435165" y="2104056"/>
+                  </a:lnTo>
+                  <a:lnTo>
+                    <a:pt x="2506788" y="2154375"/>
+                  </a:lnTo>
+                  <a:lnTo>
+                    <a:pt x="2578410" y="2202858"/>
+                  </a:lnTo>
+                  <a:lnTo>
+                    <a:pt x="2650033" y="2249572"/>
+                  </a:lnTo>
+                  <a:lnTo>
+                    <a:pt x="2721655" y="2294584"/>
+                  </a:lnTo>
+                  <a:lnTo>
+                    <a:pt x="2793278" y="2337953"/>
+                  </a:lnTo>
+                  <a:lnTo>
+                    <a:pt x="2864901" y="2379741"/>
+                  </a:lnTo>
+                  <a:lnTo>
+                    <a:pt x="2936523" y="2420005"/>
+                  </a:lnTo>
+                  <a:lnTo>
+                    <a:pt x="3008146" y="2458800"/>
+                  </a:lnTo>
+                  <a:lnTo>
+                    <a:pt x="3079768" y="2496180"/>
+                  </a:lnTo>
+                  <a:lnTo>
+                    <a:pt x="3151391" y="2532198"/>
+                  </a:lnTo>
+                  <a:lnTo>
+                    <a:pt x="3223013" y="2566901"/>
+                  </a:lnTo>
+                  <a:lnTo>
+                    <a:pt x="3294636" y="2600339"/>
+                  </a:lnTo>
+                  <a:lnTo>
+                    <a:pt x="3366258" y="2632557"/>
+                  </a:lnTo>
+                  <a:lnTo>
+                    <a:pt x="3437881" y="2657612"/>
+                  </a:lnTo>
+                  <a:lnTo>
+                    <a:pt x="3509503" y="2668467"/>
+                  </a:lnTo>
+                  <a:lnTo>
+                    <a:pt x="3581126" y="2679180"/>
+                  </a:lnTo>
+                  <a:lnTo>
+                    <a:pt x="3652748" y="2689752"/>
+                  </a:lnTo>
+                  <a:lnTo>
+                    <a:pt x="3724371" y="2700184"/>
+                  </a:lnTo>
+                  <a:lnTo>
+                    <a:pt x="3795993" y="2710480"/>
+                  </a:lnTo>
+                  <a:lnTo>
+                    <a:pt x="3867616" y="2720641"/>
+                  </a:lnTo>
+                  <a:lnTo>
+                    <a:pt x="3939238" y="2730668"/>
+                  </a:lnTo>
+                  <a:lnTo>
+                    <a:pt x="4010861" y="2740563"/>
+                  </a:lnTo>
+                  <a:lnTo>
+                    <a:pt x="4082483" y="2750328"/>
+                  </a:lnTo>
+                  <a:lnTo>
+                    <a:pt x="4154106" y="2759965"/>
+                  </a:lnTo>
+                  <a:lnTo>
+                    <a:pt x="4225729" y="2769475"/>
+                  </a:lnTo>
+                  <a:lnTo>
+                    <a:pt x="4297351" y="2778860"/>
+                  </a:lnTo>
+                  <a:lnTo>
+                    <a:pt x="4368974" y="2788122"/>
+                  </a:lnTo>
+                  <a:lnTo>
+                    <a:pt x="4440596" y="2797263"/>
+                  </a:lnTo>
+                  <a:lnTo>
+                    <a:pt x="4512219" y="2806283"/>
+                  </a:lnTo>
+                  <a:lnTo>
+                    <a:pt x="4583841" y="2815184"/>
+                  </a:lnTo>
+                  <a:lnTo>
+                    <a:pt x="4655464" y="2823969"/>
+                  </a:lnTo>
+                  <a:lnTo>
+                    <a:pt x="4727086" y="2832638"/>
+                  </a:lnTo>
+                  <a:lnTo>
+                    <a:pt x="4798709" y="2841194"/>
+                  </a:lnTo>
+                  <a:lnTo>
+                    <a:pt x="4870331" y="2849637"/>
+                  </a:lnTo>
+                  <a:lnTo>
+                    <a:pt x="4941954" y="2857969"/>
+                  </a:lnTo>
+                  <a:lnTo>
+                    <a:pt x="5013576" y="2866191"/>
+                  </a:lnTo>
+                  <a:lnTo>
+                    <a:pt x="5085199" y="2874305"/>
+                  </a:lnTo>
+                  <a:lnTo>
+                    <a:pt x="5156821" y="2882313"/>
+                  </a:lnTo>
+                  <a:lnTo>
+                    <a:pt x="5228444" y="2890216"/>
+                  </a:lnTo>
+                  <a:lnTo>
+                    <a:pt x="5300066" y="2898015"/>
+                  </a:lnTo>
+                  <a:lnTo>
+                    <a:pt x="5371689" y="2905711"/>
+                  </a:lnTo>
+                  <a:lnTo>
+                    <a:pt x="5443311" y="2913306"/>
+                  </a:lnTo>
+                  <a:lnTo>
+                    <a:pt x="5514934" y="2920802"/>
+                  </a:lnTo>
+                  <a:lnTo>
+                    <a:pt x="5586557" y="2928199"/>
+                  </a:lnTo>
+                  <a:lnTo>
+                    <a:pt x="5658179" y="2935498"/>
+                  </a:lnTo>
+                  <a:lnTo>
+                    <a:pt x="5729802" y="2942702"/>
+                  </a:lnTo>
+                  <a:lnTo>
+                    <a:pt x="5801424" y="2949811"/>
+                  </a:lnTo>
+                  <a:lnTo>
+                    <a:pt x="5873047" y="2956827"/>
+                  </a:lnTo>
+                  <a:lnTo>
+                    <a:pt x="5944669" y="2963750"/>
+                  </a:lnTo>
+                  <a:lnTo>
+                    <a:pt x="6016292" y="2970583"/>
+                  </a:lnTo>
+                  <a:lnTo>
+                    <a:pt x="6087914" y="2977326"/>
+                  </a:lnTo>
+                  <a:lnTo>
+                    <a:pt x="6159537" y="2983980"/>
+                  </a:lnTo>
+                  <a:lnTo>
+                    <a:pt x="6231159" y="2990547"/>
+                  </a:lnTo>
+                  <a:lnTo>
+                    <a:pt x="6302782" y="2997027"/>
+                  </a:lnTo>
+                  <a:lnTo>
+                    <a:pt x="6374404" y="3003423"/>
+                  </a:lnTo>
+                  <a:lnTo>
+                    <a:pt x="6446027" y="3009734"/>
+                  </a:lnTo>
+                  <a:lnTo>
+                    <a:pt x="6517649" y="3015962"/>
+                  </a:lnTo>
+                  <a:lnTo>
+                    <a:pt x="6589272" y="3022109"/>
+                  </a:lnTo>
+                  <a:lnTo>
+                    <a:pt x="6660894" y="3028174"/>
+                  </a:lnTo>
+                  <a:lnTo>
+                    <a:pt x="6732517" y="3034161"/>
+                  </a:lnTo>
+                  <a:lnTo>
+                    <a:pt x="6804139" y="3040068"/>
+                  </a:lnTo>
+                  <a:lnTo>
+                    <a:pt x="6875762" y="3045898"/>
+                  </a:lnTo>
+                  <a:lnTo>
+                    <a:pt x="6947385" y="3051651"/>
+                  </a:lnTo>
+                  <a:lnTo>
+                    <a:pt x="7019007" y="3057328"/>
+                  </a:lnTo>
+                  <a:lnTo>
+                    <a:pt x="7090630" y="3062931"/>
+                  </a:lnTo>
+                  <a:lnTo>
+                    <a:pt x="7090630" y="3360435"/>
+                  </a:lnTo>
+                  <a:lnTo>
+                    <a:pt x="7019007" y="3355767"/>
+                  </a:lnTo>
+                  <a:lnTo>
+                    <a:pt x="6947385" y="3350923"/>
+                  </a:lnTo>
+                  <a:lnTo>
+                    <a:pt x="6875762" y="3345896"/>
+                  </a:lnTo>
+                  <a:lnTo>
+                    <a:pt x="6804139" y="3340678"/>
+                  </a:lnTo>
+                  <a:lnTo>
+                    <a:pt x="6732517" y="3335263"/>
+                  </a:lnTo>
+                  <a:lnTo>
+                    <a:pt x="6660894" y="3329642"/>
+                  </a:lnTo>
+                  <a:lnTo>
+                    <a:pt x="6589272" y="3323809"/>
+                  </a:lnTo>
+                  <a:lnTo>
+                    <a:pt x="6517649" y="3317755"/>
+                  </a:lnTo>
+                  <a:lnTo>
+                    <a:pt x="6446027" y="3311473"/>
+                  </a:lnTo>
+                  <a:lnTo>
+                    <a:pt x="6374404" y="3304952"/>
+                  </a:lnTo>
+                  <a:lnTo>
+                    <a:pt x="6302782" y="3298184"/>
+                  </a:lnTo>
+                  <a:lnTo>
+                    <a:pt x="6231159" y="3291161"/>
+                  </a:lnTo>
+                  <a:lnTo>
+                    <a:pt x="6159537" y="3283871"/>
+                  </a:lnTo>
+                  <a:lnTo>
+                    <a:pt x="6087914" y="3276305"/>
+                  </a:lnTo>
+                  <a:lnTo>
+                    <a:pt x="6016292" y="3268454"/>
+                  </a:lnTo>
+                  <a:lnTo>
+                    <a:pt x="5944669" y="3260305"/>
+                  </a:lnTo>
+                  <a:lnTo>
+                    <a:pt x="5873047" y="3251847"/>
+                  </a:lnTo>
+                  <a:lnTo>
+                    <a:pt x="5801424" y="3243069"/>
+                  </a:lnTo>
+                  <a:lnTo>
+                    <a:pt x="5729802" y="3233959"/>
+                  </a:lnTo>
+                  <a:lnTo>
+                    <a:pt x="5658179" y="3224505"/>
+                  </a:lnTo>
+                  <a:lnTo>
+                    <a:pt x="5586557" y="3214692"/>
+                  </a:lnTo>
+                  <a:lnTo>
+                    <a:pt x="5514934" y="3204508"/>
+                  </a:lnTo>
+                  <a:lnTo>
+                    <a:pt x="5443311" y="3193939"/>
+                  </a:lnTo>
+                  <a:lnTo>
+                    <a:pt x="5371689" y="3182969"/>
+                  </a:lnTo>
+                  <a:lnTo>
+                    <a:pt x="5300066" y="3171584"/>
+                  </a:lnTo>
+                  <a:lnTo>
+                    <a:pt x="5228444" y="3159769"/>
+                  </a:lnTo>
+                  <a:lnTo>
+                    <a:pt x="5156821" y="3147506"/>
+                  </a:lnTo>
+                  <a:lnTo>
+                    <a:pt x="5085199" y="3134779"/>
+                  </a:lnTo>
+                  <a:lnTo>
+                    <a:pt x="5013576" y="3121570"/>
+                  </a:lnTo>
+                  <a:lnTo>
+                    <a:pt x="4941954" y="3107861"/>
+                  </a:lnTo>
+                  <a:lnTo>
+                    <a:pt x="4870331" y="3093634"/>
+                  </a:lnTo>
+                  <a:lnTo>
+                    <a:pt x="4798709" y="3078867"/>
+                  </a:lnTo>
+                  <a:lnTo>
+                    <a:pt x="4727086" y="3063542"/>
+                  </a:lnTo>
+                  <a:lnTo>
+                    <a:pt x="4655464" y="3047637"/>
+                  </a:lnTo>
+                  <a:lnTo>
+                    <a:pt x="4583841" y="3031130"/>
+                  </a:lnTo>
+                  <a:lnTo>
+                    <a:pt x="4512219" y="3013998"/>
+                  </a:lnTo>
+                  <a:lnTo>
+                    <a:pt x="4440596" y="2996217"/>
+                  </a:lnTo>
+                  <a:lnTo>
+                    <a:pt x="4368974" y="2977764"/>
+                  </a:lnTo>
+                  <a:lnTo>
+                    <a:pt x="4297351" y="2958612"/>
+                  </a:lnTo>
+                  <a:lnTo>
+                    <a:pt x="4225729" y="2938735"/>
+                  </a:lnTo>
+                  <a:lnTo>
+                    <a:pt x="4154106" y="2918106"/>
+                  </a:lnTo>
+                  <a:lnTo>
+                    <a:pt x="4082483" y="2896696"/>
+                  </a:lnTo>
+                  <a:lnTo>
+                    <a:pt x="4010861" y="2874475"/>
+                  </a:lnTo>
+                  <a:lnTo>
+                    <a:pt x="3939238" y="2851414"/>
+                  </a:lnTo>
+                  <a:lnTo>
+                    <a:pt x="3867616" y="2827479"/>
+                  </a:lnTo>
+                  <a:lnTo>
+                    <a:pt x="3795993" y="2802639"/>
+                  </a:lnTo>
+                  <a:lnTo>
+                    <a:pt x="3724371" y="2776858"/>
+                  </a:lnTo>
+                  <a:lnTo>
+                    <a:pt x="3652748" y="2750102"/>
+                  </a:lnTo>
+                  <a:lnTo>
+                    <a:pt x="3581126" y="2722332"/>
+                  </a:lnTo>
+                  <a:lnTo>
+                    <a:pt x="3509503" y="2693512"/>
+                  </a:lnTo>
+                  <a:lnTo>
+                    <a:pt x="3437881" y="2663601"/>
+                  </a:lnTo>
+                  <a:lnTo>
+                    <a:pt x="3366258" y="2646613"/>
+                  </a:lnTo>
+                  <a:lnTo>
+                    <a:pt x="3294636" y="2635466"/>
+                  </a:lnTo>
+                  <a:lnTo>
+                    <a:pt x="3223013" y="2624172"/>
+                  </a:lnTo>
+                  <a:lnTo>
+                    <a:pt x="3151391" y="2612727"/>
+                  </a:lnTo>
+                  <a:lnTo>
+                    <a:pt x="3079768" y="2601130"/>
+                  </a:lnTo>
+                  <a:lnTo>
+                    <a:pt x="3008146" y="2589378"/>
+                  </a:lnTo>
+                  <a:lnTo>
+                    <a:pt x="2936523" y="2577470"/>
+                  </a:lnTo>
+                  <a:lnTo>
+                    <a:pt x="2864901" y="2565403"/>
+                  </a:lnTo>
+                  <a:lnTo>
+                    <a:pt x="2793278" y="2553176"/>
+                  </a:lnTo>
+                  <a:lnTo>
+                    <a:pt x="2721655" y="2540786"/>
+                  </a:lnTo>
+                  <a:lnTo>
+                    <a:pt x="2650033" y="2528231"/>
+                  </a:lnTo>
+                  <a:lnTo>
+                    <a:pt x="2578410" y="2515508"/>
+                  </a:lnTo>
+                  <a:lnTo>
+                    <a:pt x="2506788" y="2502617"/>
+                  </a:lnTo>
+                  <a:lnTo>
+                    <a:pt x="2435165" y="2489553"/>
+                  </a:lnTo>
+                  <a:lnTo>
+                    <a:pt x="2363543" y="2476316"/>
+                  </a:lnTo>
+                  <a:lnTo>
+                    <a:pt x="2291920" y="2462902"/>
+                  </a:lnTo>
+                  <a:lnTo>
+                    <a:pt x="2220298" y="2449310"/>
+                  </a:lnTo>
+                  <a:lnTo>
+                    <a:pt x="2148675" y="2435537"/>
+                  </a:lnTo>
+                  <a:lnTo>
+                    <a:pt x="2077053" y="2421581"/>
+                  </a:lnTo>
+                  <a:lnTo>
+                    <a:pt x="2005430" y="2407438"/>
+                  </a:lnTo>
+                  <a:lnTo>
+                    <a:pt x="1933808" y="2393108"/>
+                  </a:lnTo>
+                  <a:lnTo>
+                    <a:pt x="1862185" y="2378586"/>
+                  </a:lnTo>
+                  <a:lnTo>
+                    <a:pt x="1790563" y="2363871"/>
+                  </a:lnTo>
+                  <a:lnTo>
+                    <a:pt x="1718940" y="2348961"/>
+                  </a:lnTo>
+                  <a:lnTo>
+                    <a:pt x="1647318" y="2333852"/>
+                  </a:lnTo>
+                  <a:lnTo>
+                    <a:pt x="1575695" y="2318541"/>
+                  </a:lnTo>
+                  <a:lnTo>
+                    <a:pt x="1504073" y="2303027"/>
+                  </a:lnTo>
+                  <a:lnTo>
+                    <a:pt x="1432450" y="2287306"/>
+                  </a:lnTo>
+                  <a:lnTo>
+                    <a:pt x="1360827" y="2271376"/>
+                  </a:lnTo>
+                  <a:lnTo>
+                    <a:pt x="1289205" y="2255234"/>
+                  </a:lnTo>
+                  <a:lnTo>
+                    <a:pt x="1217582" y="2238877"/>
+                  </a:lnTo>
+                  <a:lnTo>
+                    <a:pt x="1145960" y="2222302"/>
+                  </a:lnTo>
+                  <a:lnTo>
+                    <a:pt x="1074337" y="2205506"/>
+                  </a:lnTo>
+                  <a:lnTo>
+                    <a:pt x="1002715" y="2188487"/>
+                  </a:lnTo>
+                  <a:lnTo>
+                    <a:pt x="931092" y="2171241"/>
+                  </a:lnTo>
+                  <a:lnTo>
+                    <a:pt x="859470" y="2153765"/>
+                  </a:lnTo>
+                  <a:lnTo>
+                    <a:pt x="787847" y="2136057"/>
+                  </a:lnTo>
+                  <a:lnTo>
+                    <a:pt x="716225" y="2118113"/>
+                  </a:lnTo>
+                  <a:lnTo>
+                    <a:pt x="644602" y="2099930"/>
+                  </a:lnTo>
+                  <a:lnTo>
+                    <a:pt x="572980" y="2081505"/>
+                  </a:lnTo>
+                  <a:lnTo>
+                    <a:pt x="501357" y="2062835"/>
+                  </a:lnTo>
+                  <a:lnTo>
+                    <a:pt x="429735" y="2043916"/>
+                  </a:lnTo>
+                  <a:lnTo>
+                    <a:pt x="358112" y="2024745"/>
+                  </a:lnTo>
+                  <a:lnTo>
+                    <a:pt x="286490" y="2005319"/>
+                  </a:lnTo>
+                  <a:lnTo>
+                    <a:pt x="214867" y="1985635"/>
+                  </a:lnTo>
+                  <a:lnTo>
+                    <a:pt x="143245" y="1965688"/>
+                  </a:lnTo>
+                  <a:lnTo>
+                    <a:pt x="71622" y="1945476"/>
+                  </a:lnTo>
+                  <a:lnTo>
+                    <a:pt x="0" y="1924994"/>
                   </a:lnTo>
                   <a:close/>
                 </a:path>
@@ -3566,288 +3563,285 @@
           </p:nvSpPr>
           <p:spPr>
             <a:xfrm>
-              <a:off x="1812889" y="2073503"/>
-              <a:ext cx="6449789" cy="3060987"/>
+              <a:off x="1821668" y="2073503"/>
+              <a:ext cx="6441010" cy="3062931"/>
             </a:xfrm>
             <a:custGeom>
               <a:avLst/>
               <a:pathLst>
-                <a:path w="6449789" h="3060987">
+                <a:path w="6441010" h="3062931">
                   <a:moveTo>
                     <a:pt x="0" y="0"/>
                   </a:moveTo>
                   <a:lnTo>
-                    <a:pt x="3762" y="6891"/>
-                  </a:lnTo>
-                  <a:lnTo>
-                    <a:pt x="75385" y="133301"/>
-                  </a:lnTo>
-                  <a:lnTo>
-                    <a:pt x="147007" y="255115"/>
-                  </a:lnTo>
-                  <a:lnTo>
-                    <a:pt x="218630" y="372500"/>
-                  </a:lnTo>
-                  <a:lnTo>
-                    <a:pt x="290252" y="485618"/>
-                  </a:lnTo>
-                  <a:lnTo>
-                    <a:pt x="361875" y="594623"/>
-                  </a:lnTo>
-                  <a:lnTo>
-                    <a:pt x="433497" y="699664"/>
-                  </a:lnTo>
-                  <a:lnTo>
-                    <a:pt x="505120" y="800887"/>
-                  </a:lnTo>
-                  <a:lnTo>
-                    <a:pt x="576742" y="898429"/>
-                  </a:lnTo>
-                  <a:lnTo>
-                    <a:pt x="648365" y="992425"/>
-                  </a:lnTo>
-                  <a:lnTo>
-                    <a:pt x="719987" y="1083004"/>
-                  </a:lnTo>
-                  <a:lnTo>
-                    <a:pt x="791610" y="1170289"/>
-                  </a:lnTo>
-                  <a:lnTo>
-                    <a:pt x="863232" y="1254401"/>
-                  </a:lnTo>
-                  <a:lnTo>
-                    <a:pt x="934855" y="1335455"/>
-                  </a:lnTo>
-                  <a:lnTo>
-                    <a:pt x="1006477" y="1413561"/>
-                  </a:lnTo>
-                  <a:lnTo>
-                    <a:pt x="1078100" y="1488828"/>
-                  </a:lnTo>
-                  <a:lnTo>
-                    <a:pt x="1149722" y="1561359"/>
-                  </a:lnTo>
-                  <a:lnTo>
-                    <a:pt x="1221345" y="1631252"/>
-                  </a:lnTo>
-                  <a:lnTo>
-                    <a:pt x="1292967" y="1698605"/>
-                  </a:lnTo>
-                  <a:lnTo>
-                    <a:pt x="1364590" y="1763508"/>
-                  </a:lnTo>
-                  <a:lnTo>
-                    <a:pt x="1436213" y="1826052"/>
-                  </a:lnTo>
-                  <a:lnTo>
-                    <a:pt x="1507835" y="1886322"/>
-                  </a:lnTo>
-                  <a:lnTo>
-                    <a:pt x="1579458" y="1944400"/>
-                  </a:lnTo>
-                  <a:lnTo>
-                    <a:pt x="1651080" y="2000367"/>
-                  </a:lnTo>
-                  <a:lnTo>
-                    <a:pt x="1722703" y="2054299"/>
-                  </a:lnTo>
-                  <a:lnTo>
-                    <a:pt x="1794325" y="2106271"/>
-                  </a:lnTo>
-                  <a:lnTo>
-                    <a:pt x="1865948" y="2156352"/>
-                  </a:lnTo>
-                  <a:lnTo>
-                    <a:pt x="1937570" y="2204613"/>
-                  </a:lnTo>
-                  <a:lnTo>
-                    <a:pt x="2009193" y="2251120"/>
-                  </a:lnTo>
-                  <a:lnTo>
-                    <a:pt x="2080815" y="2295935"/>
-                  </a:lnTo>
-                  <a:lnTo>
-                    <a:pt x="2152438" y="2339121"/>
-                  </a:lnTo>
-                  <a:lnTo>
-                    <a:pt x="2224060" y="2380737"/>
-                  </a:lnTo>
-                  <a:lnTo>
-                    <a:pt x="2295683" y="2420840"/>
-                  </a:lnTo>
-                  <a:lnTo>
-                    <a:pt x="2367305" y="2459484"/>
-                  </a:lnTo>
-                  <a:lnTo>
-                    <a:pt x="2438928" y="2496724"/>
-                  </a:lnTo>
-                  <a:lnTo>
-                    <a:pt x="2510550" y="2532610"/>
-                  </a:lnTo>
-                  <a:lnTo>
-                    <a:pt x="2582173" y="2567191"/>
-                  </a:lnTo>
-                  <a:lnTo>
-                    <a:pt x="2653795" y="2600515"/>
-                  </a:lnTo>
-                  <a:lnTo>
-                    <a:pt x="2725418" y="2632627"/>
-                  </a:lnTo>
-                  <a:lnTo>
-                    <a:pt x="2797041" y="2657590"/>
-                  </a:lnTo>
-                  <a:lnTo>
-                    <a:pt x="2868663" y="2668372"/>
-                  </a:lnTo>
-                  <a:lnTo>
-                    <a:pt x="2940286" y="2679013"/>
-                  </a:lnTo>
-                  <a:lnTo>
-                    <a:pt x="3011908" y="2689516"/>
-                  </a:lnTo>
-                  <a:lnTo>
-                    <a:pt x="3083531" y="2699881"/>
-                  </a:lnTo>
-                  <a:lnTo>
-                    <a:pt x="3155153" y="2710111"/>
-                  </a:lnTo>
-                  <a:lnTo>
-                    <a:pt x="3226776" y="2720208"/>
-                  </a:lnTo>
-                  <a:lnTo>
-                    <a:pt x="3298398" y="2730173"/>
-                  </a:lnTo>
-                  <a:lnTo>
-                    <a:pt x="3370021" y="2740008"/>
-                  </a:lnTo>
-                  <a:lnTo>
-                    <a:pt x="3441643" y="2749714"/>
-                  </a:lnTo>
-                  <a:lnTo>
-                    <a:pt x="3513266" y="2759294"/>
-                  </a:lnTo>
-                  <a:lnTo>
-                    <a:pt x="3584888" y="2768749"/>
-                  </a:lnTo>
-                  <a:lnTo>
-                    <a:pt x="3656511" y="2778080"/>
-                  </a:lnTo>
-                  <a:lnTo>
-                    <a:pt x="3728133" y="2787290"/>
-                  </a:lnTo>
-                  <a:lnTo>
-                    <a:pt x="3799756" y="2796379"/>
-                  </a:lnTo>
-                  <a:lnTo>
-                    <a:pt x="3871378" y="2805350"/>
-                  </a:lnTo>
-                  <a:lnTo>
-                    <a:pt x="3943001" y="2814204"/>
-                  </a:lnTo>
-                  <a:lnTo>
-                    <a:pt x="4014623" y="2822942"/>
-                  </a:lnTo>
-                  <a:lnTo>
-                    <a:pt x="4086246" y="2831566"/>
-                  </a:lnTo>
-                  <a:lnTo>
-                    <a:pt x="4157869" y="2840078"/>
-                  </a:lnTo>
-                  <a:lnTo>
-                    <a:pt x="4229491" y="2848478"/>
-                  </a:lnTo>
-                  <a:lnTo>
-                    <a:pt x="4301114" y="2856769"/>
-                  </a:lnTo>
-                  <a:lnTo>
-                    <a:pt x="4372736" y="2864952"/>
-                  </a:lnTo>
-                  <a:lnTo>
-                    <a:pt x="4444359" y="2873028"/>
-                  </a:lnTo>
-                  <a:lnTo>
-                    <a:pt x="4515981" y="2880998"/>
-                  </a:lnTo>
-                  <a:lnTo>
-                    <a:pt x="4587604" y="2888865"/>
-                  </a:lnTo>
-                  <a:lnTo>
-                    <a:pt x="4659226" y="2896628"/>
-                  </a:lnTo>
-                  <a:lnTo>
-                    <a:pt x="4730849" y="2904291"/>
-                  </a:lnTo>
-                  <a:lnTo>
-                    <a:pt x="4802471" y="2911853"/>
-                  </a:lnTo>
-                  <a:lnTo>
-                    <a:pt x="4874094" y="2919317"/>
-                  </a:lnTo>
-                  <a:lnTo>
-                    <a:pt x="4945716" y="2926683"/>
-                  </a:lnTo>
-                  <a:lnTo>
-                    <a:pt x="5017339" y="2933954"/>
-                  </a:lnTo>
-                  <a:lnTo>
-                    <a:pt x="5088961" y="2941129"/>
-                  </a:lnTo>
-                  <a:lnTo>
-                    <a:pt x="5160584" y="2948211"/>
-                  </a:lnTo>
-                  <a:lnTo>
-                    <a:pt x="5232206" y="2955200"/>
-                  </a:lnTo>
-                  <a:lnTo>
-                    <a:pt x="5303829" y="2962098"/>
-                  </a:lnTo>
-                  <a:lnTo>
-                    <a:pt x="5375451" y="2968906"/>
-                  </a:lnTo>
-                  <a:lnTo>
-                    <a:pt x="5447074" y="2975625"/>
-                  </a:lnTo>
-                  <a:lnTo>
-                    <a:pt x="5518697" y="2982257"/>
-                  </a:lnTo>
-                  <a:lnTo>
-                    <a:pt x="5590319" y="2988802"/>
-                  </a:lnTo>
-                  <a:lnTo>
-                    <a:pt x="5661942" y="2995261"/>
-                  </a:lnTo>
-                  <a:lnTo>
-                    <a:pt x="5733564" y="3001636"/>
-                  </a:lnTo>
-                  <a:lnTo>
-                    <a:pt x="5805187" y="3007928"/>
-                  </a:lnTo>
-                  <a:lnTo>
-                    <a:pt x="5876809" y="3014138"/>
-                  </a:lnTo>
-                  <a:lnTo>
-                    <a:pt x="5948432" y="3020267"/>
-                  </a:lnTo>
-                  <a:lnTo>
-                    <a:pt x="6020054" y="3026316"/>
-                  </a:lnTo>
-                  <a:lnTo>
-                    <a:pt x="6091677" y="3032286"/>
-                  </a:lnTo>
-                  <a:lnTo>
-                    <a:pt x="6163299" y="3038178"/>
-                  </a:lnTo>
-                  <a:lnTo>
-                    <a:pt x="6234922" y="3043993"/>
-                  </a:lnTo>
-                  <a:lnTo>
-                    <a:pt x="6306544" y="3049732"/>
-                  </a:lnTo>
-                  <a:lnTo>
-                    <a:pt x="6378167" y="3055396"/>
-                  </a:lnTo>
-                  <a:lnTo>
-                    <a:pt x="6449789" y="3060987"/>
+                    <a:pt x="66605" y="118457"/>
+                  </a:lnTo>
+                  <a:lnTo>
+                    <a:pt x="138228" y="241191"/>
+                  </a:lnTo>
+                  <a:lnTo>
+                    <a:pt x="209850" y="359449"/>
+                  </a:lnTo>
+                  <a:lnTo>
+                    <a:pt x="281473" y="473394"/>
+                  </a:lnTo>
+                  <a:lnTo>
+                    <a:pt x="353095" y="583184"/>
+                  </a:lnTo>
+                  <a:lnTo>
+                    <a:pt x="424718" y="688969"/>
+                  </a:lnTo>
+                  <a:lnTo>
+                    <a:pt x="496340" y="790896"/>
+                  </a:lnTo>
+                  <a:lnTo>
+                    <a:pt x="567963" y="889106"/>
+                  </a:lnTo>
+                  <a:lnTo>
+                    <a:pt x="639585" y="983734"/>
+                  </a:lnTo>
+                  <a:lnTo>
+                    <a:pt x="711208" y="1074911"/>
+                  </a:lnTo>
+                  <a:lnTo>
+                    <a:pt x="782830" y="1162763"/>
+                  </a:lnTo>
+                  <a:lnTo>
+                    <a:pt x="854453" y="1247411"/>
+                  </a:lnTo>
+                  <a:lnTo>
+                    <a:pt x="926076" y="1328971"/>
+                  </a:lnTo>
+                  <a:lnTo>
+                    <a:pt x="997698" y="1407557"/>
+                  </a:lnTo>
+                  <a:lnTo>
+                    <a:pt x="1069321" y="1483277"/>
+                  </a:lnTo>
+                  <a:lnTo>
+                    <a:pt x="1140943" y="1556236"/>
+                  </a:lnTo>
+                  <a:lnTo>
+                    <a:pt x="1212566" y="1626533"/>
+                  </a:lnTo>
+                  <a:lnTo>
+                    <a:pt x="1284188" y="1694267"/>
+                  </a:lnTo>
+                  <a:lnTo>
+                    <a:pt x="1355811" y="1759530"/>
+                  </a:lnTo>
+                  <a:lnTo>
+                    <a:pt x="1427433" y="1822413"/>
+                  </a:lnTo>
+                  <a:lnTo>
+                    <a:pt x="1499056" y="1883003"/>
+                  </a:lnTo>
+                  <a:lnTo>
+                    <a:pt x="1570678" y="1941383"/>
+                  </a:lnTo>
+                  <a:lnTo>
+                    <a:pt x="1642301" y="1997634"/>
+                  </a:lnTo>
+                  <a:lnTo>
+                    <a:pt x="1713923" y="2051834"/>
+                  </a:lnTo>
+                  <a:lnTo>
+                    <a:pt x="1785546" y="2104056"/>
+                  </a:lnTo>
+                  <a:lnTo>
+                    <a:pt x="1857168" y="2154375"/>
+                  </a:lnTo>
+                  <a:lnTo>
+                    <a:pt x="1928791" y="2202858"/>
+                  </a:lnTo>
+                  <a:lnTo>
+                    <a:pt x="2000413" y="2249572"/>
+                  </a:lnTo>
+                  <a:lnTo>
+                    <a:pt x="2072036" y="2294584"/>
+                  </a:lnTo>
+                  <a:lnTo>
+                    <a:pt x="2143658" y="2337953"/>
+                  </a:lnTo>
+                  <a:lnTo>
+                    <a:pt x="2215281" y="2379741"/>
+                  </a:lnTo>
+                  <a:lnTo>
+                    <a:pt x="2286904" y="2420005"/>
+                  </a:lnTo>
+                  <a:lnTo>
+                    <a:pt x="2358526" y="2458800"/>
+                  </a:lnTo>
+                  <a:lnTo>
+                    <a:pt x="2430149" y="2496180"/>
+                  </a:lnTo>
+                  <a:lnTo>
+                    <a:pt x="2501771" y="2532198"/>
+                  </a:lnTo>
+                  <a:lnTo>
+                    <a:pt x="2573394" y="2566901"/>
+                  </a:lnTo>
+                  <a:lnTo>
+                    <a:pt x="2645016" y="2600339"/>
+                  </a:lnTo>
+                  <a:lnTo>
+                    <a:pt x="2716639" y="2632557"/>
+                  </a:lnTo>
+                  <a:lnTo>
+                    <a:pt x="2788261" y="2657612"/>
+                  </a:lnTo>
+                  <a:lnTo>
+                    <a:pt x="2859884" y="2668467"/>
+                  </a:lnTo>
+                  <a:lnTo>
+                    <a:pt x="2931506" y="2679180"/>
+                  </a:lnTo>
+                  <a:lnTo>
+                    <a:pt x="3003129" y="2689752"/>
+                  </a:lnTo>
+                  <a:lnTo>
+                    <a:pt x="3074751" y="2700184"/>
+                  </a:lnTo>
+                  <a:lnTo>
+                    <a:pt x="3146374" y="2710480"/>
+                  </a:lnTo>
+                  <a:lnTo>
+                    <a:pt x="3217996" y="2720641"/>
+                  </a:lnTo>
+                  <a:lnTo>
+                    <a:pt x="3289619" y="2730668"/>
+                  </a:lnTo>
+                  <a:lnTo>
+                    <a:pt x="3361241" y="2740563"/>
+                  </a:lnTo>
+                  <a:lnTo>
+                    <a:pt x="3432864" y="2750328"/>
+                  </a:lnTo>
+                  <a:lnTo>
+                    <a:pt x="3504486" y="2759965"/>
+                  </a:lnTo>
+                  <a:lnTo>
+                    <a:pt x="3576109" y="2769475"/>
+                  </a:lnTo>
+                  <a:lnTo>
+                    <a:pt x="3647732" y="2778860"/>
+                  </a:lnTo>
+                  <a:lnTo>
+                    <a:pt x="3719354" y="2788122"/>
+                  </a:lnTo>
+                  <a:lnTo>
+                    <a:pt x="3790977" y="2797263"/>
+                  </a:lnTo>
+                  <a:lnTo>
+                    <a:pt x="3862599" y="2806283"/>
+                  </a:lnTo>
+                  <a:lnTo>
+                    <a:pt x="3934222" y="2815184"/>
+                  </a:lnTo>
+                  <a:lnTo>
+                    <a:pt x="4005844" y="2823969"/>
+                  </a:lnTo>
+                  <a:lnTo>
+                    <a:pt x="4077467" y="2832638"/>
+                  </a:lnTo>
+                  <a:lnTo>
+                    <a:pt x="4149089" y="2841194"/>
+                  </a:lnTo>
+                  <a:lnTo>
+                    <a:pt x="4220712" y="2849637"/>
+                  </a:lnTo>
+                  <a:lnTo>
+                    <a:pt x="4292334" y="2857969"/>
+                  </a:lnTo>
+                  <a:lnTo>
+                    <a:pt x="4363957" y="2866191"/>
+                  </a:lnTo>
+                  <a:lnTo>
+                    <a:pt x="4435579" y="2874305"/>
+                  </a:lnTo>
+                  <a:lnTo>
+                    <a:pt x="4507202" y="2882313"/>
+                  </a:lnTo>
+                  <a:lnTo>
+                    <a:pt x="4578824" y="2890216"/>
+                  </a:lnTo>
+                  <a:lnTo>
+                    <a:pt x="4650447" y="2898015"/>
+                  </a:lnTo>
+                  <a:lnTo>
+                    <a:pt x="4722069" y="2905711"/>
+                  </a:lnTo>
+                  <a:lnTo>
+                    <a:pt x="4793692" y="2913306"/>
+                  </a:lnTo>
+                  <a:lnTo>
+                    <a:pt x="4865314" y="2920802"/>
+                  </a:lnTo>
+                  <a:lnTo>
+                    <a:pt x="4936937" y="2928199"/>
+                  </a:lnTo>
+                  <a:lnTo>
+                    <a:pt x="5008560" y="2935498"/>
+                  </a:lnTo>
+                  <a:lnTo>
+                    <a:pt x="5080182" y="2942702"/>
+                  </a:lnTo>
+                  <a:lnTo>
+                    <a:pt x="5151805" y="2949811"/>
+                  </a:lnTo>
+                  <a:lnTo>
+                    <a:pt x="5223427" y="2956827"/>
+                  </a:lnTo>
+                  <a:lnTo>
+                    <a:pt x="5295050" y="2963750"/>
+                  </a:lnTo>
+                  <a:lnTo>
+                    <a:pt x="5366672" y="2970583"/>
+                  </a:lnTo>
+                  <a:lnTo>
+                    <a:pt x="5438295" y="2977326"/>
+                  </a:lnTo>
+                  <a:lnTo>
+                    <a:pt x="5509917" y="2983980"/>
+                  </a:lnTo>
+                  <a:lnTo>
+                    <a:pt x="5581540" y="2990547"/>
+                  </a:lnTo>
+                  <a:lnTo>
+                    <a:pt x="5653162" y="2997027"/>
+                  </a:lnTo>
+                  <a:lnTo>
+                    <a:pt x="5724785" y="3003423"/>
+                  </a:lnTo>
+                  <a:lnTo>
+                    <a:pt x="5796407" y="3009734"/>
+                  </a:lnTo>
+                  <a:lnTo>
+                    <a:pt x="5868030" y="3015962"/>
+                  </a:lnTo>
+                  <a:lnTo>
+                    <a:pt x="5939652" y="3022109"/>
+                  </a:lnTo>
+                  <a:lnTo>
+                    <a:pt x="6011275" y="3028174"/>
+                  </a:lnTo>
+                  <a:lnTo>
+                    <a:pt x="6082897" y="3034161"/>
+                  </a:lnTo>
+                  <a:lnTo>
+                    <a:pt x="6154520" y="3040068"/>
+                  </a:lnTo>
+                  <a:lnTo>
+                    <a:pt x="6226142" y="3045898"/>
+                  </a:lnTo>
+                  <a:lnTo>
+                    <a:pt x="6297765" y="3051651"/>
+                  </a:lnTo>
+                  <a:lnTo>
+                    <a:pt x="6369388" y="3057328"/>
+                  </a:lnTo>
+                  <a:lnTo>
+                    <a:pt x="6441010" y="3062931"/>
                   </a:lnTo>
                 </a:path>
               </a:pathLst>
@@ -3867,309 +3861,309 @@
           </p:nvSpPr>
           <p:spPr>
             <a:xfrm>
-              <a:off x="1172049" y="4005164"/>
-              <a:ext cx="7090630" cy="1428029"/>
+              <a:off x="1172049" y="3998497"/>
+              <a:ext cx="7090630" cy="1435440"/>
             </a:xfrm>
             <a:custGeom>
               <a:avLst/>
               <a:pathLst>
-                <a:path w="7090630" h="1428029">
+                <a:path w="7090630" h="1435440">
                   <a:moveTo>
-                    <a:pt x="7090630" y="1428029"/>
+                    <a:pt x="7090630" y="1435440"/>
                   </a:moveTo>
                   <a:lnTo>
-                    <a:pt x="7019007" y="1423348"/>
-                  </a:lnTo>
-                  <a:lnTo>
-                    <a:pt x="6947385" y="1418491"/>
-                  </a:lnTo>
-                  <a:lnTo>
-                    <a:pt x="6875762" y="1413451"/>
-                  </a:lnTo>
-                  <a:lnTo>
-                    <a:pt x="6804139" y="1408220"/>
-                  </a:lnTo>
-                  <a:lnTo>
-                    <a:pt x="6732517" y="1402792"/>
-                  </a:lnTo>
-                  <a:lnTo>
-                    <a:pt x="6660894" y="1397160"/>
-                  </a:lnTo>
-                  <a:lnTo>
-                    <a:pt x="6589272" y="1391314"/>
-                  </a:lnTo>
-                  <a:lnTo>
-                    <a:pt x="6517649" y="1385249"/>
-                  </a:lnTo>
-                  <a:lnTo>
-                    <a:pt x="6446027" y="1378954"/>
-                  </a:lnTo>
-                  <a:lnTo>
-                    <a:pt x="6374404" y="1372422"/>
-                  </a:lnTo>
-                  <a:lnTo>
-                    <a:pt x="6302782" y="1365643"/>
-                  </a:lnTo>
-                  <a:lnTo>
-                    <a:pt x="6231159" y="1358609"/>
-                  </a:lnTo>
-                  <a:lnTo>
-                    <a:pt x="6159537" y="1351309"/>
-                  </a:lnTo>
-                  <a:lnTo>
-                    <a:pt x="6087914" y="1343734"/>
-                  </a:lnTo>
-                  <a:lnTo>
-                    <a:pt x="6016292" y="1335873"/>
-                  </a:lnTo>
-                  <a:lnTo>
-                    <a:pt x="5944669" y="1327716"/>
-                  </a:lnTo>
-                  <a:lnTo>
-                    <a:pt x="5873047" y="1319250"/>
-                  </a:lnTo>
-                  <a:lnTo>
-                    <a:pt x="5801424" y="1310466"/>
-                  </a:lnTo>
-                  <a:lnTo>
-                    <a:pt x="5729802" y="1301350"/>
-                  </a:lnTo>
-                  <a:lnTo>
-                    <a:pt x="5658179" y="1291890"/>
-                  </a:lnTo>
-                  <a:lnTo>
-                    <a:pt x="5586557" y="1282073"/>
-                  </a:lnTo>
-                  <a:lnTo>
-                    <a:pt x="5514934" y="1271885"/>
-                  </a:lnTo>
-                  <a:lnTo>
-                    <a:pt x="5443311" y="1261313"/>
-                  </a:lnTo>
-                  <a:lnTo>
-                    <a:pt x="5371689" y="1250343"/>
-                  </a:lnTo>
-                  <a:lnTo>
-                    <a:pt x="5300066" y="1238958"/>
-                  </a:lnTo>
-                  <a:lnTo>
-                    <a:pt x="5228444" y="1227144"/>
-                  </a:lnTo>
-                  <a:lnTo>
-                    <a:pt x="5156821" y="1214884"/>
-                  </a:lnTo>
-                  <a:lnTo>
-                    <a:pt x="5085199" y="1202162"/>
-                  </a:lnTo>
-                  <a:lnTo>
-                    <a:pt x="5013576" y="1188960"/>
-                  </a:lnTo>
-                  <a:lnTo>
-                    <a:pt x="4941954" y="1175259"/>
-                  </a:lnTo>
-                  <a:lnTo>
-                    <a:pt x="4870331" y="1161042"/>
-                  </a:lnTo>
-                  <a:lnTo>
-                    <a:pt x="4798709" y="1146288"/>
-                  </a:lnTo>
-                  <a:lnTo>
-                    <a:pt x="4727086" y="1130978"/>
-                  </a:lnTo>
-                  <a:lnTo>
-                    <a:pt x="4655464" y="1115090"/>
-                  </a:lnTo>
-                  <a:lnTo>
-                    <a:pt x="4583841" y="1098602"/>
-                  </a:lnTo>
-                  <a:lnTo>
-                    <a:pt x="4512219" y="1081492"/>
-                  </a:lnTo>
-                  <a:lnTo>
-                    <a:pt x="4440596" y="1063737"/>
-                  </a:lnTo>
-                  <a:lnTo>
-                    <a:pt x="4368974" y="1045312"/>
-                  </a:lnTo>
-                  <a:lnTo>
-                    <a:pt x="4297351" y="1026192"/>
-                  </a:lnTo>
-                  <a:lnTo>
-                    <a:pt x="4225729" y="1006350"/>
-                  </a:lnTo>
-                  <a:lnTo>
-                    <a:pt x="4154106" y="985760"/>
-                  </a:lnTo>
-                  <a:lnTo>
-                    <a:pt x="4082483" y="964393"/>
-                  </a:lnTo>
-                  <a:lnTo>
-                    <a:pt x="4010861" y="942220"/>
-                  </a:lnTo>
-                  <a:lnTo>
-                    <a:pt x="3939238" y="919210"/>
-                  </a:lnTo>
-                  <a:lnTo>
-                    <a:pt x="3867616" y="895332"/>
-                  </a:lnTo>
-                  <a:lnTo>
-                    <a:pt x="3795993" y="870553"/>
-                  </a:lnTo>
-                  <a:lnTo>
-                    <a:pt x="3724371" y="844839"/>
-                  </a:lnTo>
-                  <a:lnTo>
-                    <a:pt x="3652748" y="818156"/>
-                  </a:lnTo>
-                  <a:lnTo>
-                    <a:pt x="3581126" y="790465"/>
-                  </a:lnTo>
-                  <a:lnTo>
-                    <a:pt x="3509503" y="761729"/>
-                  </a:lnTo>
-                  <a:lnTo>
-                    <a:pt x="3437881" y="731910"/>
-                  </a:lnTo>
-                  <a:lnTo>
-                    <a:pt x="3366258" y="715003"/>
-                  </a:lnTo>
-                  <a:lnTo>
-                    <a:pt x="3294636" y="703934"/>
-                  </a:lnTo>
-                  <a:lnTo>
-                    <a:pt x="3223013" y="692718"/>
-                  </a:lnTo>
-                  <a:lnTo>
-                    <a:pt x="3151391" y="681355"/>
-                  </a:lnTo>
-                  <a:lnTo>
-                    <a:pt x="3079768" y="669840"/>
-                  </a:lnTo>
-                  <a:lnTo>
-                    <a:pt x="3008146" y="658174"/>
-                  </a:lnTo>
-                  <a:lnTo>
-                    <a:pt x="2936523" y="646353"/>
-                  </a:lnTo>
-                  <a:lnTo>
-                    <a:pt x="2864901" y="634376"/>
-                  </a:lnTo>
-                  <a:lnTo>
-                    <a:pt x="2793278" y="622241"/>
-                  </a:lnTo>
-                  <a:lnTo>
-                    <a:pt x="2721655" y="609945"/>
-                  </a:lnTo>
-                  <a:lnTo>
-                    <a:pt x="2650033" y="597487"/>
-                  </a:lnTo>
-                  <a:lnTo>
-                    <a:pt x="2578410" y="584864"/>
-                  </a:lnTo>
-                  <a:lnTo>
-                    <a:pt x="2506788" y="572074"/>
-                  </a:lnTo>
-                  <a:lnTo>
-                    <a:pt x="2435165" y="559114"/>
-                  </a:lnTo>
-                  <a:lnTo>
-                    <a:pt x="2363543" y="545984"/>
-                  </a:lnTo>
-                  <a:lnTo>
-                    <a:pt x="2291920" y="532680"/>
-                  </a:lnTo>
-                  <a:lnTo>
-                    <a:pt x="2220298" y="519199"/>
-                  </a:lnTo>
-                  <a:lnTo>
-                    <a:pt x="2148675" y="505541"/>
-                  </a:lnTo>
-                  <a:lnTo>
-                    <a:pt x="2077053" y="491702"/>
-                  </a:lnTo>
-                  <a:lnTo>
-                    <a:pt x="2005430" y="477680"/>
-                  </a:lnTo>
-                  <a:lnTo>
-                    <a:pt x="1933808" y="463473"/>
-                  </a:lnTo>
-                  <a:lnTo>
-                    <a:pt x="1862185" y="449077"/>
-                  </a:lnTo>
-                  <a:lnTo>
-                    <a:pt x="1790563" y="434492"/>
-                  </a:lnTo>
-                  <a:lnTo>
-                    <a:pt x="1718940" y="419713"/>
-                  </a:lnTo>
-                  <a:lnTo>
-                    <a:pt x="1647318" y="404739"/>
-                  </a:lnTo>
-                  <a:lnTo>
-                    <a:pt x="1575695" y="389567"/>
-                  </a:lnTo>
-                  <a:lnTo>
-                    <a:pt x="1504073" y="374194"/>
-                  </a:lnTo>
-                  <a:lnTo>
-                    <a:pt x="1432450" y="358619"/>
-                  </a:lnTo>
-                  <a:lnTo>
-                    <a:pt x="1360827" y="342837"/>
-                  </a:lnTo>
-                  <a:lnTo>
-                    <a:pt x="1289205" y="326846"/>
-                  </a:lnTo>
-                  <a:lnTo>
-                    <a:pt x="1217582" y="310644"/>
-                  </a:lnTo>
-                  <a:lnTo>
-                    <a:pt x="1145960" y="294228"/>
-                  </a:lnTo>
-                  <a:lnTo>
-                    <a:pt x="1074337" y="277595"/>
-                  </a:lnTo>
-                  <a:lnTo>
-                    <a:pt x="1002715" y="260741"/>
-                  </a:lnTo>
-                  <a:lnTo>
-                    <a:pt x="931092" y="243665"/>
-                  </a:lnTo>
-                  <a:lnTo>
-                    <a:pt x="859470" y="226363"/>
-                  </a:lnTo>
-                  <a:lnTo>
-                    <a:pt x="787847" y="208833"/>
-                  </a:lnTo>
-                  <a:lnTo>
-                    <a:pt x="716225" y="191070"/>
-                  </a:lnTo>
-                  <a:lnTo>
-                    <a:pt x="644602" y="173073"/>
-                  </a:lnTo>
-                  <a:lnTo>
-                    <a:pt x="572980" y="154837"/>
-                  </a:lnTo>
-                  <a:lnTo>
-                    <a:pt x="501357" y="136361"/>
-                  </a:lnTo>
-                  <a:lnTo>
-                    <a:pt x="429735" y="117640"/>
-                  </a:lnTo>
-                  <a:lnTo>
-                    <a:pt x="358112" y="98671"/>
-                  </a:lnTo>
-                  <a:lnTo>
-                    <a:pt x="286490" y="79452"/>
-                  </a:lnTo>
-                  <a:lnTo>
-                    <a:pt x="214867" y="59978"/>
-                  </a:lnTo>
-                  <a:lnTo>
-                    <a:pt x="143245" y="40248"/>
-                  </a:lnTo>
-                  <a:lnTo>
-                    <a:pt x="71622" y="20256"/>
+                    <a:pt x="7019007" y="1430773"/>
+                  </a:lnTo>
+                  <a:lnTo>
+                    <a:pt x="6947385" y="1425929"/>
+                  </a:lnTo>
+                  <a:lnTo>
+                    <a:pt x="6875762" y="1420901"/>
+                  </a:lnTo>
+                  <a:lnTo>
+                    <a:pt x="6804139" y="1415683"/>
+                  </a:lnTo>
+                  <a:lnTo>
+                    <a:pt x="6732517" y="1410268"/>
+                  </a:lnTo>
+                  <a:lnTo>
+                    <a:pt x="6660894" y="1404648"/>
+                  </a:lnTo>
+                  <a:lnTo>
+                    <a:pt x="6589272" y="1398815"/>
+                  </a:lnTo>
+                  <a:lnTo>
+                    <a:pt x="6517649" y="1392761"/>
+                  </a:lnTo>
+                  <a:lnTo>
+                    <a:pt x="6446027" y="1386478"/>
+                  </a:lnTo>
+                  <a:lnTo>
+                    <a:pt x="6374404" y="1379957"/>
+                  </a:lnTo>
+                  <a:lnTo>
+                    <a:pt x="6302782" y="1373190"/>
+                  </a:lnTo>
+                  <a:lnTo>
+                    <a:pt x="6231159" y="1366166"/>
+                  </a:lnTo>
+                  <a:lnTo>
+                    <a:pt x="6159537" y="1358876"/>
+                  </a:lnTo>
+                  <a:lnTo>
+                    <a:pt x="6087914" y="1351311"/>
+                  </a:lnTo>
+                  <a:lnTo>
+                    <a:pt x="6016292" y="1343459"/>
+                  </a:lnTo>
+                  <a:lnTo>
+                    <a:pt x="5944669" y="1335310"/>
+                  </a:lnTo>
+                  <a:lnTo>
+                    <a:pt x="5873047" y="1326852"/>
+                  </a:lnTo>
+                  <a:lnTo>
+                    <a:pt x="5801424" y="1318075"/>
+                  </a:lnTo>
+                  <a:lnTo>
+                    <a:pt x="5729802" y="1308965"/>
+                  </a:lnTo>
+                  <a:lnTo>
+                    <a:pt x="5658179" y="1299510"/>
+                  </a:lnTo>
+                  <a:lnTo>
+                    <a:pt x="5586557" y="1289698"/>
+                  </a:lnTo>
+                  <a:lnTo>
+                    <a:pt x="5514934" y="1279514"/>
+                  </a:lnTo>
+                  <a:lnTo>
+                    <a:pt x="5443311" y="1268944"/>
+                  </a:lnTo>
+                  <a:lnTo>
+                    <a:pt x="5371689" y="1257975"/>
+                  </a:lnTo>
+                  <a:lnTo>
+                    <a:pt x="5300066" y="1246590"/>
+                  </a:lnTo>
+                  <a:lnTo>
+                    <a:pt x="5228444" y="1234774"/>
+                  </a:lnTo>
+                  <a:lnTo>
+                    <a:pt x="5156821" y="1222511"/>
+                  </a:lnTo>
+                  <a:lnTo>
+                    <a:pt x="5085199" y="1209784"/>
+                  </a:lnTo>
+                  <a:lnTo>
+                    <a:pt x="5013576" y="1196575"/>
+                  </a:lnTo>
+                  <a:lnTo>
+                    <a:pt x="4941954" y="1182867"/>
+                  </a:lnTo>
+                  <a:lnTo>
+                    <a:pt x="4870331" y="1168639"/>
+                  </a:lnTo>
+                  <a:lnTo>
+                    <a:pt x="4798709" y="1153873"/>
+                  </a:lnTo>
+                  <a:lnTo>
+                    <a:pt x="4727086" y="1138548"/>
+                  </a:lnTo>
+                  <a:lnTo>
+                    <a:pt x="4655464" y="1122643"/>
+                  </a:lnTo>
+                  <a:lnTo>
+                    <a:pt x="4583841" y="1106135"/>
+                  </a:lnTo>
+                  <a:lnTo>
+                    <a:pt x="4512219" y="1089003"/>
+                  </a:lnTo>
+                  <a:lnTo>
+                    <a:pt x="4440596" y="1071223"/>
+                  </a:lnTo>
+                  <a:lnTo>
+                    <a:pt x="4368974" y="1052769"/>
+                  </a:lnTo>
+                  <a:lnTo>
+                    <a:pt x="4297351" y="1033617"/>
+                  </a:lnTo>
+                  <a:lnTo>
+                    <a:pt x="4225729" y="1013740"/>
+                  </a:lnTo>
+                  <a:lnTo>
+                    <a:pt x="4154106" y="993111"/>
+                  </a:lnTo>
+                  <a:lnTo>
+                    <a:pt x="4082483" y="971701"/>
+                  </a:lnTo>
+                  <a:lnTo>
+                    <a:pt x="4010861" y="949481"/>
+                  </a:lnTo>
+                  <a:lnTo>
+                    <a:pt x="3939238" y="926419"/>
+                  </a:lnTo>
+                  <a:lnTo>
+                    <a:pt x="3867616" y="902485"/>
+                  </a:lnTo>
+                  <a:lnTo>
+                    <a:pt x="3795993" y="877644"/>
+                  </a:lnTo>
+                  <a:lnTo>
+                    <a:pt x="3724371" y="851863"/>
+                  </a:lnTo>
+                  <a:lnTo>
+                    <a:pt x="3652748" y="825107"/>
+                  </a:lnTo>
+                  <a:lnTo>
+                    <a:pt x="3581126" y="797338"/>
+                  </a:lnTo>
+                  <a:lnTo>
+                    <a:pt x="3509503" y="768517"/>
+                  </a:lnTo>
+                  <a:lnTo>
+                    <a:pt x="3437881" y="738606"/>
+                  </a:lnTo>
+                  <a:lnTo>
+                    <a:pt x="3366258" y="721618"/>
+                  </a:lnTo>
+                  <a:lnTo>
+                    <a:pt x="3294636" y="710472"/>
+                  </a:lnTo>
+                  <a:lnTo>
+                    <a:pt x="3223013" y="699177"/>
+                  </a:lnTo>
+                  <a:lnTo>
+                    <a:pt x="3151391" y="687732"/>
+                  </a:lnTo>
+                  <a:lnTo>
+                    <a:pt x="3079768" y="676135"/>
+                  </a:lnTo>
+                  <a:lnTo>
+                    <a:pt x="3008146" y="664383"/>
+                  </a:lnTo>
+                  <a:lnTo>
+                    <a:pt x="2936523" y="652475"/>
+                  </a:lnTo>
+                  <a:lnTo>
+                    <a:pt x="2864901" y="640409"/>
+                  </a:lnTo>
+                  <a:lnTo>
+                    <a:pt x="2793278" y="628181"/>
+                  </a:lnTo>
+                  <a:lnTo>
+                    <a:pt x="2721655" y="615791"/>
+                  </a:lnTo>
+                  <a:lnTo>
+                    <a:pt x="2650033" y="603236"/>
+                  </a:lnTo>
+                  <a:lnTo>
+                    <a:pt x="2578410" y="590514"/>
+                  </a:lnTo>
+                  <a:lnTo>
+                    <a:pt x="2506788" y="577622"/>
+                  </a:lnTo>
+                  <a:lnTo>
+                    <a:pt x="2435165" y="564559"/>
+                  </a:lnTo>
+                  <a:lnTo>
+                    <a:pt x="2363543" y="551321"/>
+                  </a:lnTo>
+                  <a:lnTo>
+                    <a:pt x="2291920" y="537908"/>
+                  </a:lnTo>
+                  <a:lnTo>
+                    <a:pt x="2220298" y="524316"/>
+                  </a:lnTo>
+                  <a:lnTo>
+                    <a:pt x="2148675" y="510542"/>
+                  </a:lnTo>
+                  <a:lnTo>
+                    <a:pt x="2077053" y="496586"/>
+                  </a:lnTo>
+                  <a:lnTo>
+                    <a:pt x="2005430" y="482444"/>
+                  </a:lnTo>
+                  <a:lnTo>
+                    <a:pt x="1933808" y="468113"/>
+                  </a:lnTo>
+                  <a:lnTo>
+                    <a:pt x="1862185" y="453592"/>
+                  </a:lnTo>
+                  <a:lnTo>
+                    <a:pt x="1790563" y="438877"/>
+                  </a:lnTo>
+                  <a:lnTo>
+                    <a:pt x="1718940" y="423966"/>
+                  </a:lnTo>
+                  <a:lnTo>
+                    <a:pt x="1647318" y="408857"/>
+                  </a:lnTo>
+                  <a:lnTo>
+                    <a:pt x="1575695" y="393547"/>
+                  </a:lnTo>
+                  <a:lnTo>
+                    <a:pt x="1504073" y="378032"/>
+                  </a:lnTo>
+                  <a:lnTo>
+                    <a:pt x="1432450" y="362311"/>
+                  </a:lnTo>
+                  <a:lnTo>
+                    <a:pt x="1360827" y="346381"/>
+                  </a:lnTo>
+                  <a:lnTo>
+                    <a:pt x="1289205" y="330239"/>
+                  </a:lnTo>
+                  <a:lnTo>
+                    <a:pt x="1217582" y="313882"/>
+                  </a:lnTo>
+                  <a:lnTo>
+                    <a:pt x="1145960" y="297307"/>
+                  </a:lnTo>
+                  <a:lnTo>
+                    <a:pt x="1074337" y="280511"/>
+                  </a:lnTo>
+                  <a:lnTo>
+                    <a:pt x="1002715" y="263492"/>
+                  </a:lnTo>
+                  <a:lnTo>
+                    <a:pt x="931092" y="246246"/>
+                  </a:lnTo>
+                  <a:lnTo>
+                    <a:pt x="859470" y="228771"/>
+                  </a:lnTo>
+                  <a:lnTo>
+                    <a:pt x="787847" y="211063"/>
+                  </a:lnTo>
+                  <a:lnTo>
+                    <a:pt x="716225" y="193119"/>
+                  </a:lnTo>
+                  <a:lnTo>
+                    <a:pt x="644602" y="174936"/>
+                  </a:lnTo>
+                  <a:lnTo>
+                    <a:pt x="572980" y="156511"/>
+                  </a:lnTo>
+                  <a:lnTo>
+                    <a:pt x="501357" y="137840"/>
+                  </a:lnTo>
+                  <a:lnTo>
+                    <a:pt x="429735" y="118922"/>
+                  </a:lnTo>
+                  <a:lnTo>
+                    <a:pt x="358112" y="99751"/>
+                  </a:lnTo>
+                  <a:lnTo>
+                    <a:pt x="286490" y="80325"/>
+                  </a:lnTo>
+                  <a:lnTo>
+                    <a:pt x="214867" y="60640"/>
+                  </a:lnTo>
+                  <a:lnTo>
+                    <a:pt x="143245" y="40693"/>
+                  </a:lnTo>
+                  <a:lnTo>
+                    <a:pt x="71622" y="20481"/>
                   </a:lnTo>
                   <a:lnTo>
                     <a:pt x="0" y="0"/>
@@ -4192,312 +4186,312 @@
           </p:nvSpPr>
           <p:spPr>
             <a:xfrm>
-              <a:off x="1172049" y="2812962"/>
-              <a:ext cx="7090630" cy="2515277"/>
+              <a:off x="1172049" y="2799372"/>
+              <a:ext cx="7090630" cy="2530080"/>
             </a:xfrm>
             <a:custGeom>
               <a:avLst/>
               <a:pathLst>
-                <a:path w="7090630" h="2515277">
+                <a:path w="7090630" h="2530080">
                   <a:moveTo>
                     <a:pt x="0" y="0"/>
                   </a:moveTo>
                   <a:lnTo>
-                    <a:pt x="71622" y="67986"/>
-                  </a:lnTo>
-                  <a:lnTo>
-                    <a:pt x="143245" y="134289"/>
-                  </a:lnTo>
-                  <a:lnTo>
-                    <a:pt x="214867" y="198949"/>
-                  </a:lnTo>
-                  <a:lnTo>
-                    <a:pt x="286490" y="262007"/>
-                  </a:lnTo>
-                  <a:lnTo>
-                    <a:pt x="358112" y="323502"/>
-                  </a:lnTo>
-                  <a:lnTo>
-                    <a:pt x="429735" y="383475"/>
-                  </a:lnTo>
-                  <a:lnTo>
-                    <a:pt x="501357" y="441961"/>
-                  </a:lnTo>
-                  <a:lnTo>
-                    <a:pt x="572980" y="498999"/>
-                  </a:lnTo>
-                  <a:lnTo>
-                    <a:pt x="644602" y="554623"/>
-                  </a:lnTo>
-                  <a:lnTo>
-                    <a:pt x="716225" y="608870"/>
-                  </a:lnTo>
-                  <a:lnTo>
-                    <a:pt x="787847" y="661773"/>
-                  </a:lnTo>
-                  <a:lnTo>
-                    <a:pt x="859470" y="713365"/>
-                  </a:lnTo>
-                  <a:lnTo>
-                    <a:pt x="931092" y="763679"/>
-                  </a:lnTo>
-                  <a:lnTo>
-                    <a:pt x="1002715" y="812746"/>
-                  </a:lnTo>
-                  <a:lnTo>
-                    <a:pt x="1074337" y="860598"/>
-                  </a:lnTo>
-                  <a:lnTo>
-                    <a:pt x="1145960" y="907264"/>
-                  </a:lnTo>
-                  <a:lnTo>
-                    <a:pt x="1217582" y="952774"/>
-                  </a:lnTo>
-                  <a:lnTo>
-                    <a:pt x="1289205" y="997157"/>
-                  </a:lnTo>
-                  <a:lnTo>
-                    <a:pt x="1360827" y="1040440"/>
-                  </a:lnTo>
-                  <a:lnTo>
-                    <a:pt x="1432450" y="1082651"/>
-                  </a:lnTo>
-                  <a:lnTo>
-                    <a:pt x="1504073" y="1123817"/>
-                  </a:lnTo>
-                  <a:lnTo>
-                    <a:pt x="1575695" y="1163962"/>
-                  </a:lnTo>
-                  <a:lnTo>
-                    <a:pt x="1647318" y="1203113"/>
-                  </a:lnTo>
-                  <a:lnTo>
-                    <a:pt x="1718940" y="1241294"/>
-                  </a:lnTo>
-                  <a:lnTo>
-                    <a:pt x="1790563" y="1278529"/>
-                  </a:lnTo>
-                  <a:lnTo>
-                    <a:pt x="1862185" y="1314841"/>
-                  </a:lnTo>
-                  <a:lnTo>
-                    <a:pt x="1933808" y="1350254"/>
-                  </a:lnTo>
-                  <a:lnTo>
-                    <a:pt x="2005430" y="1384790"/>
-                  </a:lnTo>
-                  <a:lnTo>
-                    <a:pt x="2077053" y="1418470"/>
-                  </a:lnTo>
-                  <a:lnTo>
-                    <a:pt x="2148675" y="1451316"/>
-                  </a:lnTo>
-                  <a:lnTo>
-                    <a:pt x="2220298" y="1483348"/>
-                  </a:lnTo>
-                  <a:lnTo>
-                    <a:pt x="2291920" y="1514586"/>
-                  </a:lnTo>
-                  <a:lnTo>
-                    <a:pt x="2363543" y="1545051"/>
-                  </a:lnTo>
-                  <a:lnTo>
-                    <a:pt x="2435165" y="1574760"/>
-                  </a:lnTo>
-                  <a:lnTo>
-                    <a:pt x="2506788" y="1603734"/>
-                  </a:lnTo>
-                  <a:lnTo>
-                    <a:pt x="2578410" y="1631990"/>
-                  </a:lnTo>
-                  <a:lnTo>
-                    <a:pt x="2650033" y="1659546"/>
-                  </a:lnTo>
-                  <a:lnTo>
-                    <a:pt x="2721655" y="1686419"/>
-                  </a:lnTo>
-                  <a:lnTo>
-                    <a:pt x="2793278" y="1712627"/>
-                  </a:lnTo>
-                  <a:lnTo>
-                    <a:pt x="2864901" y="1738185"/>
-                  </a:lnTo>
-                  <a:lnTo>
-                    <a:pt x="2936523" y="1763110"/>
-                  </a:lnTo>
-                  <a:lnTo>
-                    <a:pt x="3008146" y="1787418"/>
-                  </a:lnTo>
-                  <a:lnTo>
-                    <a:pt x="3079768" y="1811123"/>
-                  </a:lnTo>
-                  <a:lnTo>
-                    <a:pt x="3151391" y="1834241"/>
-                  </a:lnTo>
-                  <a:lnTo>
-                    <a:pt x="3223013" y="1856787"/>
-                  </a:lnTo>
-                  <a:lnTo>
-                    <a:pt x="3294636" y="1878773"/>
-                  </a:lnTo>
-                  <a:lnTo>
-                    <a:pt x="3366258" y="1900216"/>
-                  </a:lnTo>
-                  <a:lnTo>
-                    <a:pt x="3437881" y="1921127"/>
-                  </a:lnTo>
-                  <a:lnTo>
-                    <a:pt x="3509503" y="1941519"/>
-                  </a:lnTo>
-                  <a:lnTo>
-                    <a:pt x="3581126" y="1961407"/>
-                  </a:lnTo>
-                  <a:lnTo>
-                    <a:pt x="3652748" y="1980802"/>
-                  </a:lnTo>
-                  <a:lnTo>
-                    <a:pt x="3724371" y="1999717"/>
-                  </a:lnTo>
-                  <a:lnTo>
-                    <a:pt x="3795993" y="2018163"/>
-                  </a:lnTo>
-                  <a:lnTo>
-                    <a:pt x="3867616" y="2036152"/>
-                  </a:lnTo>
-                  <a:lnTo>
-                    <a:pt x="3939238" y="2053695"/>
-                  </a:lnTo>
-                  <a:lnTo>
-                    <a:pt x="4010861" y="2070804"/>
-                  </a:lnTo>
-                  <a:lnTo>
-                    <a:pt x="4082483" y="2087488"/>
-                  </a:lnTo>
-                  <a:lnTo>
-                    <a:pt x="4154106" y="2103760"/>
-                  </a:lnTo>
-                  <a:lnTo>
-                    <a:pt x="4225729" y="2119628"/>
-                  </a:lnTo>
-                  <a:lnTo>
-                    <a:pt x="4297351" y="2135103"/>
-                  </a:lnTo>
-                  <a:lnTo>
-                    <a:pt x="4368974" y="2150195"/>
-                  </a:lnTo>
-                  <a:lnTo>
-                    <a:pt x="4440596" y="2164913"/>
-                  </a:lnTo>
-                  <a:lnTo>
-                    <a:pt x="4512219" y="2179267"/>
-                  </a:lnTo>
-                  <a:lnTo>
-                    <a:pt x="4583841" y="2193264"/>
-                  </a:lnTo>
-                  <a:lnTo>
-                    <a:pt x="4655464" y="2206915"/>
-                  </a:lnTo>
-                  <a:lnTo>
-                    <a:pt x="4727086" y="2220228"/>
-                  </a:lnTo>
-                  <a:lnTo>
-                    <a:pt x="4798709" y="2233211"/>
-                  </a:lnTo>
-                  <a:lnTo>
-                    <a:pt x="4870331" y="2245872"/>
-                  </a:lnTo>
-                  <a:lnTo>
-                    <a:pt x="4941954" y="2258220"/>
-                  </a:lnTo>
-                  <a:lnTo>
-                    <a:pt x="5013576" y="2270262"/>
-                  </a:lnTo>
-                  <a:lnTo>
-                    <a:pt x="5085199" y="2282005"/>
-                  </a:lnTo>
-                  <a:lnTo>
-                    <a:pt x="5156821" y="2293458"/>
-                  </a:lnTo>
-                  <a:lnTo>
-                    <a:pt x="5228444" y="2304627"/>
-                  </a:lnTo>
-                  <a:lnTo>
-                    <a:pt x="5300066" y="2315519"/>
-                  </a:lnTo>
-                  <a:lnTo>
-                    <a:pt x="5371689" y="2326141"/>
-                  </a:lnTo>
-                  <a:lnTo>
-                    <a:pt x="5443311" y="2336500"/>
-                  </a:lnTo>
-                  <a:lnTo>
-                    <a:pt x="5514934" y="2346603"/>
-                  </a:lnTo>
-                  <a:lnTo>
-                    <a:pt x="5586557" y="2356455"/>
-                  </a:lnTo>
-                  <a:lnTo>
-                    <a:pt x="5658179" y="2366063"/>
-                  </a:lnTo>
-                  <a:lnTo>
-                    <a:pt x="5729802" y="2375433"/>
-                  </a:lnTo>
-                  <a:lnTo>
-                    <a:pt x="5801424" y="2384571"/>
-                  </a:lnTo>
-                  <a:lnTo>
-                    <a:pt x="5873047" y="2393483"/>
-                  </a:lnTo>
-                  <a:lnTo>
-                    <a:pt x="5944669" y="2402173"/>
-                  </a:lnTo>
-                  <a:lnTo>
-                    <a:pt x="6016292" y="2410649"/>
-                  </a:lnTo>
-                  <a:lnTo>
-                    <a:pt x="6087914" y="2418914"/>
-                  </a:lnTo>
-                  <a:lnTo>
-                    <a:pt x="6159537" y="2426975"/>
-                  </a:lnTo>
-                  <a:lnTo>
-                    <a:pt x="6231159" y="2434836"/>
-                  </a:lnTo>
-                  <a:lnTo>
-                    <a:pt x="6302782" y="2442503"/>
-                  </a:lnTo>
-                  <a:lnTo>
-                    <a:pt x="6374404" y="2449979"/>
-                  </a:lnTo>
-                  <a:lnTo>
-                    <a:pt x="6446027" y="2457270"/>
-                  </a:lnTo>
-                  <a:lnTo>
-                    <a:pt x="6517649" y="2464381"/>
-                  </a:lnTo>
-                  <a:lnTo>
-                    <a:pt x="6589272" y="2471315"/>
-                  </a:lnTo>
-                  <a:lnTo>
-                    <a:pt x="6660894" y="2478078"/>
-                  </a:lnTo>
-                  <a:lnTo>
-                    <a:pt x="6732517" y="2484673"/>
-                  </a:lnTo>
-                  <a:lnTo>
-                    <a:pt x="6804139" y="2491104"/>
-                  </a:lnTo>
-                  <a:lnTo>
-                    <a:pt x="6875762" y="2497377"/>
-                  </a:lnTo>
-                  <a:lnTo>
-                    <a:pt x="6947385" y="2503494"/>
-                  </a:lnTo>
-                  <a:lnTo>
-                    <a:pt x="7019007" y="2509459"/>
-                  </a:lnTo>
-                  <a:lnTo>
-                    <a:pt x="7090630" y="2515277"/>
+                    <a:pt x="71622" y="68601"/>
+                  </a:lnTo>
+                  <a:lnTo>
+                    <a:pt x="143245" y="135497"/>
+                  </a:lnTo>
+                  <a:lnTo>
+                    <a:pt x="214867" y="200728"/>
+                  </a:lnTo>
+                  <a:lnTo>
+                    <a:pt x="286490" y="264337"/>
+                  </a:lnTo>
+                  <a:lnTo>
+                    <a:pt x="358112" y="326364"/>
+                  </a:lnTo>
+                  <a:lnTo>
+                    <a:pt x="429735" y="386848"/>
+                  </a:lnTo>
+                  <a:lnTo>
+                    <a:pt x="501357" y="445827"/>
+                  </a:lnTo>
+                  <a:lnTo>
+                    <a:pt x="572980" y="503339"/>
+                  </a:lnTo>
+                  <a:lnTo>
+                    <a:pt x="644602" y="559420"/>
+                  </a:lnTo>
+                  <a:lnTo>
+                    <a:pt x="716225" y="614107"/>
+                  </a:lnTo>
+                  <a:lnTo>
+                    <a:pt x="787847" y="667433"/>
+                  </a:lnTo>
+                  <a:lnTo>
+                    <a:pt x="859470" y="719432"/>
+                  </a:lnTo>
+                  <a:lnTo>
+                    <a:pt x="931092" y="770138"/>
+                  </a:lnTo>
+                  <a:lnTo>
+                    <a:pt x="1002715" y="819583"/>
+                  </a:lnTo>
+                  <a:lnTo>
+                    <a:pt x="1074337" y="867798"/>
+                  </a:lnTo>
+                  <a:lnTo>
+                    <a:pt x="1145960" y="914814"/>
+                  </a:lnTo>
+                  <a:lnTo>
+                    <a:pt x="1217582" y="960660"/>
+                  </a:lnTo>
+                  <a:lnTo>
+                    <a:pt x="1289205" y="1005365"/>
+                  </a:lnTo>
+                  <a:lnTo>
+                    <a:pt x="1360827" y="1048959"/>
+                  </a:lnTo>
+                  <a:lnTo>
+                    <a:pt x="1432450" y="1091468"/>
+                  </a:lnTo>
+                  <a:lnTo>
+                    <a:pt x="1504073" y="1132920"/>
+                  </a:lnTo>
+                  <a:lnTo>
+                    <a:pt x="1575695" y="1173341"/>
+                  </a:lnTo>
+                  <a:lnTo>
+                    <a:pt x="1647318" y="1212756"/>
+                  </a:lnTo>
+                  <a:lnTo>
+                    <a:pt x="1718940" y="1251191"/>
+                  </a:lnTo>
+                  <a:lnTo>
+                    <a:pt x="1790563" y="1288669"/>
+                  </a:lnTo>
+                  <a:lnTo>
+                    <a:pt x="1862185" y="1325216"/>
+                  </a:lnTo>
+                  <a:lnTo>
+                    <a:pt x="1933808" y="1360853"/>
+                  </a:lnTo>
+                  <a:lnTo>
+                    <a:pt x="2005430" y="1395604"/>
+                  </a:lnTo>
+                  <a:lnTo>
+                    <a:pt x="2077053" y="1429490"/>
+                  </a:lnTo>
+                  <a:lnTo>
+                    <a:pt x="2148675" y="1462534"/>
+                  </a:lnTo>
+                  <a:lnTo>
+                    <a:pt x="2220298" y="1494755"/>
+                  </a:lnTo>
+                  <a:lnTo>
+                    <a:pt x="2291920" y="1526175"/>
+                  </a:lnTo>
+                  <a:lnTo>
+                    <a:pt x="2363543" y="1556814"/>
+                  </a:lnTo>
+                  <a:lnTo>
+                    <a:pt x="2435165" y="1586690"/>
+                  </a:lnTo>
+                  <a:lnTo>
+                    <a:pt x="2506788" y="1615823"/>
+                  </a:lnTo>
+                  <a:lnTo>
+                    <a:pt x="2578410" y="1644232"/>
+                  </a:lnTo>
+                  <a:lnTo>
+                    <a:pt x="2650033" y="1671934"/>
+                  </a:lnTo>
+                  <a:lnTo>
+                    <a:pt x="2721655" y="1698946"/>
+                  </a:lnTo>
+                  <a:lnTo>
+                    <a:pt x="2793278" y="1725287"/>
+                  </a:lnTo>
+                  <a:lnTo>
+                    <a:pt x="2864901" y="1750973"/>
+                  </a:lnTo>
+                  <a:lnTo>
+                    <a:pt x="2936523" y="1776019"/>
+                  </a:lnTo>
+                  <a:lnTo>
+                    <a:pt x="3008146" y="1800443"/>
+                  </a:lnTo>
+                  <a:lnTo>
+                    <a:pt x="3079768" y="1824259"/>
+                  </a:lnTo>
+                  <a:lnTo>
+                    <a:pt x="3151391" y="1847483"/>
+                  </a:lnTo>
+                  <a:lnTo>
+                    <a:pt x="3223013" y="1870129"/>
+                  </a:lnTo>
+                  <a:lnTo>
+                    <a:pt x="3294636" y="1892211"/>
+                  </a:lnTo>
+                  <a:lnTo>
+                    <a:pt x="3366258" y="1913745"/>
+                  </a:lnTo>
+                  <a:lnTo>
+                    <a:pt x="3437881" y="1934742"/>
+                  </a:lnTo>
+                  <a:lnTo>
+                    <a:pt x="3509503" y="1955218"/>
+                  </a:lnTo>
+                  <a:lnTo>
+                    <a:pt x="3581126" y="1975184"/>
+                  </a:lnTo>
+                  <a:lnTo>
+                    <a:pt x="3652748" y="1994653"/>
+                  </a:lnTo>
+                  <a:lnTo>
+                    <a:pt x="3724371" y="2013638"/>
+                  </a:lnTo>
+                  <a:lnTo>
+                    <a:pt x="3795993" y="2032151"/>
+                  </a:lnTo>
+                  <a:lnTo>
+                    <a:pt x="3867616" y="2050204"/>
+                  </a:lnTo>
+                  <a:lnTo>
+                    <a:pt x="3939238" y="2067807"/>
+                  </a:lnTo>
+                  <a:lnTo>
+                    <a:pt x="4010861" y="2084972"/>
+                  </a:lnTo>
+                  <a:lnTo>
+                    <a:pt x="4082483" y="2101711"/>
+                  </a:lnTo>
+                  <a:lnTo>
+                    <a:pt x="4154106" y="2118033"/>
+                  </a:lnTo>
+                  <a:lnTo>
+                    <a:pt x="4225729" y="2133949"/>
+                  </a:lnTo>
+                  <a:lnTo>
+                    <a:pt x="4297351" y="2149469"/>
+                  </a:lnTo>
+                  <a:lnTo>
+                    <a:pt x="4368974" y="2164603"/>
+                  </a:lnTo>
+                  <a:lnTo>
+                    <a:pt x="4440596" y="2179361"/>
+                  </a:lnTo>
+                  <a:lnTo>
+                    <a:pt x="4512219" y="2193751"/>
+                  </a:lnTo>
+                  <a:lnTo>
+                    <a:pt x="4583841" y="2207784"/>
+                  </a:lnTo>
+                  <a:lnTo>
+                    <a:pt x="4655464" y="2221467"/>
+                  </a:lnTo>
+                  <a:lnTo>
+                    <a:pt x="4727086" y="2234811"/>
+                  </a:lnTo>
+                  <a:lnTo>
+                    <a:pt x="4798709" y="2247822"/>
+                  </a:lnTo>
+                  <a:lnTo>
+                    <a:pt x="4870331" y="2260509"/>
+                  </a:lnTo>
+                  <a:lnTo>
+                    <a:pt x="4941954" y="2272881"/>
+                  </a:lnTo>
+                  <a:lnTo>
+                    <a:pt x="5013576" y="2284946"/>
+                  </a:lnTo>
+                  <a:lnTo>
+                    <a:pt x="5085199" y="2296710"/>
+                  </a:lnTo>
+                  <a:lnTo>
+                    <a:pt x="5156821" y="2308181"/>
+                  </a:lnTo>
+                  <a:lnTo>
+                    <a:pt x="5228444" y="2319367"/>
+                  </a:lnTo>
+                  <a:lnTo>
+                    <a:pt x="5300066" y="2330275"/>
+                  </a:lnTo>
+                  <a:lnTo>
+                    <a:pt x="5371689" y="2340912"/>
+                  </a:lnTo>
+                  <a:lnTo>
+                    <a:pt x="5443311" y="2351284"/>
+                  </a:lnTo>
+                  <a:lnTo>
+                    <a:pt x="5514934" y="2361398"/>
+                  </a:lnTo>
+                  <a:lnTo>
+                    <a:pt x="5586557" y="2371260"/>
+                  </a:lnTo>
+                  <a:lnTo>
+                    <a:pt x="5658179" y="2380877"/>
+                  </a:lnTo>
+                  <a:lnTo>
+                    <a:pt x="5729802" y="2390255"/>
+                  </a:lnTo>
+                  <a:lnTo>
+                    <a:pt x="5801424" y="2399400"/>
+                  </a:lnTo>
+                  <a:lnTo>
+                    <a:pt x="5873047" y="2408317"/>
+                  </a:lnTo>
+                  <a:lnTo>
+                    <a:pt x="5944669" y="2417012"/>
+                  </a:lnTo>
+                  <a:lnTo>
+                    <a:pt x="6016292" y="2425491"/>
+                  </a:lnTo>
+                  <a:lnTo>
+                    <a:pt x="6087914" y="2433759"/>
+                  </a:lnTo>
+                  <a:lnTo>
+                    <a:pt x="6159537" y="2441821"/>
+                  </a:lnTo>
+                  <a:lnTo>
+                    <a:pt x="6231159" y="2449683"/>
+                  </a:lnTo>
+                  <a:lnTo>
+                    <a:pt x="6302782" y="2457350"/>
+                  </a:lnTo>
+                  <a:lnTo>
+                    <a:pt x="6374404" y="2464825"/>
+                  </a:lnTo>
+                  <a:lnTo>
+                    <a:pt x="6446027" y="2472115"/>
+                  </a:lnTo>
+                  <a:lnTo>
+                    <a:pt x="6517649" y="2479223"/>
+                  </a:lnTo>
+                  <a:lnTo>
+                    <a:pt x="6589272" y="2486155"/>
+                  </a:lnTo>
+                  <a:lnTo>
+                    <a:pt x="6660894" y="2492914"/>
+                  </a:lnTo>
+                  <a:lnTo>
+                    <a:pt x="6732517" y="2499505"/>
+                  </a:lnTo>
+                  <a:lnTo>
+                    <a:pt x="6804139" y="2505932"/>
+                  </a:lnTo>
+                  <a:lnTo>
+                    <a:pt x="6875762" y="2512199"/>
+                  </a:lnTo>
+                  <a:lnTo>
+                    <a:pt x="6947385" y="2518310"/>
+                  </a:lnTo>
+                  <a:lnTo>
+                    <a:pt x="7019007" y="2524269"/>
+                  </a:lnTo>
+                  <a:lnTo>
+                    <a:pt x="7090630" y="2530080"/>
                   </a:lnTo>
                 </a:path>
               </a:pathLst>
@@ -5105,7 +5099,7 @@
                   <a:latin typeface="Helvetica"/>
                   <a:cs typeface="Helvetica"/>
                 </a:rPr>
-                <a:t>subHR per 10 % decline: 1.35 (1.17-1.56), p_Bonf = &lt;0.001 (n = 6)  |  per IQR decline (Δ = 29.3 %): 2.42 (1.59-3.68)  |  IQR: [-14.6, 14.7] %</a:t>
+                <a:t>subHR per 10 % decline: 1.35 (1.17-1.56), p_Bonf = &lt;0.001 (n = 6)  |  per IQR decline (Δ = 29.3 %): 2.43 (1.59-3.69)  |  IQR: [-14.6, 14.7] %</a:t>
               </a:r>
             </a:p>
           </p:txBody>
